--- a/public/fun/cards/office/office-24.pptx
+++ b/public/fun/cards/office/office-24.pptx
@@ -3085,7 +3085,7 @@
     <p:bg>
       <p:bgPr>
         <a:solidFill>
-          <a:srgbClr val="274649"/>
+          <a:srgbClr val="0E1116"/>
         </a:solidFill>
         <a:effectLst/>
       </p:bgPr>
@@ -3099,38 +3099,20 @@
       <p:grpSpPr/>
       <p:sp>
         <p:nvSpPr>
-          <p:cNvPr id="2" name="Freeform 1"/>
+          <p:cNvPr id="2" name="Oval 1"/>
           <p:cNvSpPr/>
           <p:nvPr/>
         </p:nvSpPr>
         <p:spPr>
           <a:xfrm>
-            <a:off x="1944000" y="540000"/>
-            <a:ext cx="1296000" cy="1260000"/>
-          </a:xfrm>
-          <a:custGeom>
+            <a:off x="2646000" y="234000"/>
+            <a:ext cx="36000" cy="36000"/>
+          </a:xfrm>
+          <a:prstGeom prst="ellipse">
             <a:avLst/>
-            <a:gdLst/>
-            <a:ahLst/>
-            <a:cxnLst/>
-            <a:rect l="l" t="t" r="r" b="b"/>
-            <a:pathLst>
-              <a:path w="1296000" h="1260000">
-                <a:moveTo>
-                  <a:pt x="1296000" y="1260000"/>
-                </a:moveTo>
-                <a:lnTo>
-                  <a:pt x="1296000" y="0"/>
-                </a:lnTo>
-                <a:lnTo>
-                  <a:pt x="0" y="1260000"/>
-                </a:lnTo>
-                <a:close/>
-              </a:path>
-            </a:pathLst>
-          </a:custGeom>
+          </a:prstGeom>
           <a:solidFill>
-            <a:srgbClr val="7DA8AB"/>
+            <a:srgbClr val="E5169B"/>
           </a:solidFill>
           <a:ln>
             <a:noFill/>
@@ -3146,40 +3128,20 @@
       </p:sp>
       <p:sp>
         <p:nvSpPr>
-          <p:cNvPr id="3" name="Freeform 2"/>
+          <p:cNvPr id="3" name="Oval 2"/>
           <p:cNvSpPr/>
           <p:nvPr/>
         </p:nvSpPr>
         <p:spPr>
           <a:xfrm>
-            <a:off x="2520000" y="1080000"/>
-            <a:ext cx="720000" cy="720000"/>
-          </a:xfrm>
-          <a:custGeom>
+            <a:off x="2646000" y="334800"/>
+            <a:ext cx="36000" cy="36000"/>
+          </a:xfrm>
+          <a:prstGeom prst="ellipse">
             <a:avLst/>
-            <a:gdLst/>
-            <a:ahLst/>
-            <a:cxnLst/>
-            <a:rect l="l" t="t" r="r" b="b"/>
-            <a:pathLst>
-              <a:path w="720000" h="720000">
-                <a:moveTo>
-                  <a:pt x="720000" y="720000"/>
-                </a:moveTo>
-                <a:lnTo>
-                  <a:pt x="720000" y="0"/>
-                </a:lnTo>
-                <a:lnTo>
-                  <a:pt x="0" y="720000"/>
-                </a:lnTo>
-                <a:close/>
-              </a:path>
-            </a:pathLst>
-          </a:custGeom>
+          </a:prstGeom>
           <a:solidFill>
-            <a:srgbClr val="4A6466">
-              <a:alpha val="90000"/>
-            </a:srgbClr>
+            <a:srgbClr val="26292D"/>
           </a:solidFill>
           <a:ln>
             <a:noFill/>
@@ -3193,121 +3155,538 @@
           </a:p>
         </p:txBody>
       </p:sp>
-      <p:cxnSp>
-        <p:nvCxnSpPr>
-          <p:cNvPr id="4" name="Connector 3"/>
-          <p:cNvCxnSpPr/>
+      <p:sp>
+        <p:nvSpPr>
+          <p:cNvPr id="4" name="Oval 3"/>
+          <p:cNvSpPr/>
           <p:nvPr/>
-        </p:nvCxnSpPr>
-        <p:spPr>
-          <a:xfrm flipH="1">
-            <a:off x="2845440" y="1406736"/>
-            <a:ext cx="69264" cy="69264"/>
-          </a:xfrm>
-          <a:prstGeom prst="line">
+        </p:nvSpPr>
+        <p:spPr>
+          <a:xfrm>
+            <a:off x="2646000" y="435600"/>
+            <a:ext cx="36000" cy="36000"/>
+          </a:xfrm>
+          <a:prstGeom prst="ellipse">
             <a:avLst/>
           </a:prstGeom>
-          <a:ln w="21312">
-            <a:solidFill>
-              <a:srgbClr val="FFFFFF"/>
-            </a:solidFill>
+          <a:solidFill>
+            <a:srgbClr val="26292D"/>
+          </a:solidFill>
+          <a:ln>
+            <a:noFill/>
           </a:ln>
         </p:spPr>
-      </p:cxnSp>
-      <p:cxnSp>
-        <p:nvCxnSpPr>
-          <p:cNvPr id="5" name="Connector 4"/>
-          <p:cNvCxnSpPr/>
+        <p:txBody>
+          <a:bodyPr rtlCol="0" anchor="ctr"/>
+          <a:lstStyle/>
+          <a:p>
+            <a:pPr algn="ctr"/>
+          </a:p>
+        </p:txBody>
+      </p:sp>
+      <p:sp>
+        <p:nvSpPr>
+          <p:cNvPr id="5" name="Oval 4"/>
+          <p:cNvSpPr/>
           <p:nvPr/>
-        </p:nvCxnSpPr>
-        <p:spPr>
-          <a:xfrm>
-            <a:off x="2845440" y="1476000"/>
-            <a:ext cx="69264" cy="69264"/>
-          </a:xfrm>
-          <a:prstGeom prst="line">
+        </p:nvSpPr>
+        <p:spPr>
+          <a:xfrm>
+            <a:off x="2646000" y="536400"/>
+            <a:ext cx="36000" cy="36000"/>
+          </a:xfrm>
+          <a:prstGeom prst="ellipse">
             <a:avLst/>
           </a:prstGeom>
-          <a:ln w="21312">
-            <a:solidFill>
-              <a:srgbClr val="FFFFFF"/>
-            </a:solidFill>
+          <a:solidFill>
+            <a:srgbClr val="E5169B"/>
+          </a:solidFill>
+          <a:ln>
+            <a:noFill/>
           </a:ln>
         </p:spPr>
-      </p:cxnSp>
-      <p:cxnSp>
-        <p:nvCxnSpPr>
-          <p:cNvPr id="6" name="Connector 5"/>
-          <p:cNvCxnSpPr/>
+        <p:txBody>
+          <a:bodyPr rtlCol="0" anchor="ctr"/>
+          <a:lstStyle/>
+          <a:p>
+            <a:pPr algn="ctr"/>
+          </a:p>
+        </p:txBody>
+      </p:sp>
+      <p:sp>
+        <p:nvSpPr>
+          <p:cNvPr id="6" name="Oval 5"/>
+          <p:cNvSpPr/>
           <p:nvPr/>
-        </p:nvCxnSpPr>
-        <p:spPr>
-          <a:xfrm>
-            <a:off x="2989296" y="1406736"/>
-            <a:ext cx="69264" cy="69264"/>
-          </a:xfrm>
-          <a:prstGeom prst="line">
+        </p:nvSpPr>
+        <p:spPr>
+          <a:xfrm>
+            <a:off x="2746800" y="234000"/>
+            <a:ext cx="36000" cy="36000"/>
+          </a:xfrm>
+          <a:prstGeom prst="ellipse">
             <a:avLst/>
           </a:prstGeom>
-          <a:ln w="21312">
-            <a:solidFill>
-              <a:srgbClr val="FFFFFF"/>
-            </a:solidFill>
+          <a:solidFill>
+            <a:srgbClr val="26292D"/>
+          </a:solidFill>
+          <a:ln>
+            <a:noFill/>
           </a:ln>
         </p:spPr>
-      </p:cxnSp>
-      <p:cxnSp>
-        <p:nvCxnSpPr>
-          <p:cNvPr id="7" name="Connector 6"/>
-          <p:cNvCxnSpPr/>
+        <p:txBody>
+          <a:bodyPr rtlCol="0" anchor="ctr"/>
+          <a:lstStyle/>
+          <a:p>
+            <a:pPr algn="ctr"/>
+          </a:p>
+        </p:txBody>
+      </p:sp>
+      <p:sp>
+        <p:nvSpPr>
+          <p:cNvPr id="7" name="Oval 6"/>
+          <p:cNvSpPr/>
           <p:nvPr/>
-        </p:nvCxnSpPr>
-        <p:spPr>
-          <a:xfrm flipH="1">
-            <a:off x="2989296" y="1476000"/>
-            <a:ext cx="69264" cy="69264"/>
-          </a:xfrm>
-          <a:prstGeom prst="line">
+        </p:nvSpPr>
+        <p:spPr>
+          <a:xfrm>
+            <a:off x="2746800" y="334800"/>
+            <a:ext cx="36000" cy="36000"/>
+          </a:xfrm>
+          <a:prstGeom prst="ellipse">
             <a:avLst/>
           </a:prstGeom>
-          <a:ln w="21312">
-            <a:solidFill>
-              <a:srgbClr val="FFFFFF"/>
-            </a:solidFill>
+          <a:solidFill>
+            <a:srgbClr val="26292D"/>
+          </a:solidFill>
+          <a:ln>
+            <a:noFill/>
           </a:ln>
         </p:spPr>
-      </p:cxnSp>
-      <p:cxnSp>
-        <p:nvCxnSpPr>
-          <p:cNvPr id="8" name="Connector 7"/>
-          <p:cNvCxnSpPr/>
+        <p:txBody>
+          <a:bodyPr rtlCol="0" anchor="ctr"/>
+          <a:lstStyle/>
+          <a:p>
+            <a:pPr algn="ctr"/>
+          </a:p>
+        </p:txBody>
+      </p:sp>
+      <p:sp>
+        <p:nvSpPr>
+          <p:cNvPr id="8" name="Oval 7"/>
+          <p:cNvSpPr/>
           <p:nvPr/>
-        </p:nvCxnSpPr>
-        <p:spPr>
-          <a:xfrm flipH="1">
-            <a:off x="2930688" y="1385424"/>
-            <a:ext cx="42624" cy="181152"/>
-          </a:xfrm>
-          <a:prstGeom prst="line">
+        </p:nvSpPr>
+        <p:spPr>
+          <a:xfrm>
+            <a:off x="2746800" y="435600"/>
+            <a:ext cx="36000" cy="36000"/>
+          </a:xfrm>
+          <a:prstGeom prst="ellipse">
             <a:avLst/>
           </a:prstGeom>
-          <a:ln w="18648">
-            <a:solidFill>
-              <a:srgbClr val="FFFFFF"/>
-            </a:solidFill>
+          <a:solidFill>
+            <a:srgbClr val="E5169B"/>
+          </a:solidFill>
+          <a:ln>
+            <a:noFill/>
           </a:ln>
         </p:spPr>
-      </p:cxnSp>
-      <p:sp>
-        <p:nvSpPr>
-          <p:cNvPr id="9" name="텍스트"/>
+        <p:txBody>
+          <a:bodyPr rtlCol="0" anchor="ctr"/>
+          <a:lstStyle/>
+          <a:p>
+            <a:pPr algn="ctr"/>
+          </a:p>
+        </p:txBody>
+      </p:sp>
+      <p:sp>
+        <p:nvSpPr>
+          <p:cNvPr id="9" name="Oval 8"/>
+          <p:cNvSpPr/>
+          <p:nvPr/>
+        </p:nvSpPr>
+        <p:spPr>
+          <a:xfrm>
+            <a:off x="2746800" y="536400"/>
+            <a:ext cx="36000" cy="36000"/>
+          </a:xfrm>
+          <a:prstGeom prst="ellipse">
+            <a:avLst/>
+          </a:prstGeom>
+          <a:solidFill>
+            <a:srgbClr val="26292D"/>
+          </a:solidFill>
+          <a:ln>
+            <a:noFill/>
+          </a:ln>
+        </p:spPr>
+        <p:txBody>
+          <a:bodyPr rtlCol="0" anchor="ctr"/>
+          <a:lstStyle/>
+          <a:p>
+            <a:pPr algn="ctr"/>
+          </a:p>
+        </p:txBody>
+      </p:sp>
+      <p:sp>
+        <p:nvSpPr>
+          <p:cNvPr id="10" name="Oval 9"/>
+          <p:cNvSpPr/>
+          <p:nvPr/>
+        </p:nvSpPr>
+        <p:spPr>
+          <a:xfrm>
+            <a:off x="2847600" y="234000"/>
+            <a:ext cx="36000" cy="36000"/>
+          </a:xfrm>
+          <a:prstGeom prst="ellipse">
+            <a:avLst/>
+          </a:prstGeom>
+          <a:solidFill>
+            <a:srgbClr val="26292D"/>
+          </a:solidFill>
+          <a:ln>
+            <a:noFill/>
+          </a:ln>
+        </p:spPr>
+        <p:txBody>
+          <a:bodyPr rtlCol="0" anchor="ctr"/>
+          <a:lstStyle/>
+          <a:p>
+            <a:pPr algn="ctr"/>
+          </a:p>
+        </p:txBody>
+      </p:sp>
+      <p:sp>
+        <p:nvSpPr>
+          <p:cNvPr id="11" name="Oval 10"/>
+          <p:cNvSpPr/>
+          <p:nvPr/>
+        </p:nvSpPr>
+        <p:spPr>
+          <a:xfrm>
+            <a:off x="2847600" y="334800"/>
+            <a:ext cx="36000" cy="36000"/>
+          </a:xfrm>
+          <a:prstGeom prst="ellipse">
+            <a:avLst/>
+          </a:prstGeom>
+          <a:solidFill>
+            <a:srgbClr val="E5169B"/>
+          </a:solidFill>
+          <a:ln>
+            <a:noFill/>
+          </a:ln>
+        </p:spPr>
+        <p:txBody>
+          <a:bodyPr rtlCol="0" anchor="ctr"/>
+          <a:lstStyle/>
+          <a:p>
+            <a:pPr algn="ctr"/>
+          </a:p>
+        </p:txBody>
+      </p:sp>
+      <p:sp>
+        <p:nvSpPr>
+          <p:cNvPr id="12" name="Oval 11"/>
+          <p:cNvSpPr/>
+          <p:nvPr/>
+        </p:nvSpPr>
+        <p:spPr>
+          <a:xfrm>
+            <a:off x="2847600" y="435600"/>
+            <a:ext cx="36000" cy="36000"/>
+          </a:xfrm>
+          <a:prstGeom prst="ellipse">
+            <a:avLst/>
+          </a:prstGeom>
+          <a:solidFill>
+            <a:srgbClr val="26292D"/>
+          </a:solidFill>
+          <a:ln>
+            <a:noFill/>
+          </a:ln>
+        </p:spPr>
+        <p:txBody>
+          <a:bodyPr rtlCol="0" anchor="ctr"/>
+          <a:lstStyle/>
+          <a:p>
+            <a:pPr algn="ctr"/>
+          </a:p>
+        </p:txBody>
+      </p:sp>
+      <p:sp>
+        <p:nvSpPr>
+          <p:cNvPr id="13" name="Oval 12"/>
+          <p:cNvSpPr/>
+          <p:nvPr/>
+        </p:nvSpPr>
+        <p:spPr>
+          <a:xfrm>
+            <a:off x="2847600" y="536400"/>
+            <a:ext cx="36000" cy="36000"/>
+          </a:xfrm>
+          <a:prstGeom prst="ellipse">
+            <a:avLst/>
+          </a:prstGeom>
+          <a:solidFill>
+            <a:srgbClr val="26292D"/>
+          </a:solidFill>
+          <a:ln>
+            <a:noFill/>
+          </a:ln>
+        </p:spPr>
+        <p:txBody>
+          <a:bodyPr rtlCol="0" anchor="ctr"/>
+          <a:lstStyle/>
+          <a:p>
+            <a:pPr algn="ctr"/>
+          </a:p>
+        </p:txBody>
+      </p:sp>
+      <p:sp>
+        <p:nvSpPr>
+          <p:cNvPr id="14" name="Oval 13"/>
+          <p:cNvSpPr/>
+          <p:nvPr/>
+        </p:nvSpPr>
+        <p:spPr>
+          <a:xfrm>
+            <a:off x="2948400" y="234000"/>
+            <a:ext cx="36000" cy="36000"/>
+          </a:xfrm>
+          <a:prstGeom prst="ellipse">
+            <a:avLst/>
+          </a:prstGeom>
+          <a:solidFill>
+            <a:srgbClr val="E5169B"/>
+          </a:solidFill>
+          <a:ln>
+            <a:noFill/>
+          </a:ln>
+        </p:spPr>
+        <p:txBody>
+          <a:bodyPr rtlCol="0" anchor="ctr"/>
+          <a:lstStyle/>
+          <a:p>
+            <a:pPr algn="ctr"/>
+          </a:p>
+        </p:txBody>
+      </p:sp>
+      <p:sp>
+        <p:nvSpPr>
+          <p:cNvPr id="15" name="Oval 14"/>
+          <p:cNvSpPr/>
+          <p:nvPr/>
+        </p:nvSpPr>
+        <p:spPr>
+          <a:xfrm>
+            <a:off x="2948400" y="334800"/>
+            <a:ext cx="36000" cy="36000"/>
+          </a:xfrm>
+          <a:prstGeom prst="ellipse">
+            <a:avLst/>
+          </a:prstGeom>
+          <a:solidFill>
+            <a:srgbClr val="26292D"/>
+          </a:solidFill>
+          <a:ln>
+            <a:noFill/>
+          </a:ln>
+        </p:spPr>
+        <p:txBody>
+          <a:bodyPr rtlCol="0" anchor="ctr"/>
+          <a:lstStyle/>
+          <a:p>
+            <a:pPr algn="ctr"/>
+          </a:p>
+        </p:txBody>
+      </p:sp>
+      <p:sp>
+        <p:nvSpPr>
+          <p:cNvPr id="16" name="Oval 15"/>
+          <p:cNvSpPr/>
+          <p:nvPr/>
+        </p:nvSpPr>
+        <p:spPr>
+          <a:xfrm>
+            <a:off x="2948400" y="435600"/>
+            <a:ext cx="36000" cy="36000"/>
+          </a:xfrm>
+          <a:prstGeom prst="ellipse">
+            <a:avLst/>
+          </a:prstGeom>
+          <a:solidFill>
+            <a:srgbClr val="26292D"/>
+          </a:solidFill>
+          <a:ln>
+            <a:noFill/>
+          </a:ln>
+        </p:spPr>
+        <p:txBody>
+          <a:bodyPr rtlCol="0" anchor="ctr"/>
+          <a:lstStyle/>
+          <a:p>
+            <a:pPr algn="ctr"/>
+          </a:p>
+        </p:txBody>
+      </p:sp>
+      <p:sp>
+        <p:nvSpPr>
+          <p:cNvPr id="17" name="Oval 16"/>
+          <p:cNvSpPr/>
+          <p:nvPr/>
+        </p:nvSpPr>
+        <p:spPr>
+          <a:xfrm>
+            <a:off x="2948400" y="536400"/>
+            <a:ext cx="36000" cy="36000"/>
+          </a:xfrm>
+          <a:prstGeom prst="ellipse">
+            <a:avLst/>
+          </a:prstGeom>
+          <a:solidFill>
+            <a:srgbClr val="E5169B"/>
+          </a:solidFill>
+          <a:ln>
+            <a:noFill/>
+          </a:ln>
+        </p:spPr>
+        <p:txBody>
+          <a:bodyPr rtlCol="0" anchor="ctr"/>
+          <a:lstStyle/>
+          <a:p>
+            <a:pPr algn="ctr"/>
+          </a:p>
+        </p:txBody>
+      </p:sp>
+      <p:sp>
+        <p:nvSpPr>
+          <p:cNvPr id="18" name="Oval 17"/>
+          <p:cNvSpPr/>
+          <p:nvPr/>
+        </p:nvSpPr>
+        <p:spPr>
+          <a:xfrm>
+            <a:off x="3049200" y="234000"/>
+            <a:ext cx="36000" cy="36000"/>
+          </a:xfrm>
+          <a:prstGeom prst="ellipse">
+            <a:avLst/>
+          </a:prstGeom>
+          <a:solidFill>
+            <a:srgbClr val="26292D"/>
+          </a:solidFill>
+          <a:ln>
+            <a:noFill/>
+          </a:ln>
+        </p:spPr>
+        <p:txBody>
+          <a:bodyPr rtlCol="0" anchor="ctr"/>
+          <a:lstStyle/>
+          <a:p>
+            <a:pPr algn="ctr"/>
+          </a:p>
+        </p:txBody>
+      </p:sp>
+      <p:sp>
+        <p:nvSpPr>
+          <p:cNvPr id="19" name="Oval 18"/>
+          <p:cNvSpPr/>
+          <p:nvPr/>
+        </p:nvSpPr>
+        <p:spPr>
+          <a:xfrm>
+            <a:off x="3049200" y="334800"/>
+            <a:ext cx="36000" cy="36000"/>
+          </a:xfrm>
+          <a:prstGeom prst="ellipse">
+            <a:avLst/>
+          </a:prstGeom>
+          <a:solidFill>
+            <a:srgbClr val="26292D"/>
+          </a:solidFill>
+          <a:ln>
+            <a:noFill/>
+          </a:ln>
+        </p:spPr>
+        <p:txBody>
+          <a:bodyPr rtlCol="0" anchor="ctr"/>
+          <a:lstStyle/>
+          <a:p>
+            <a:pPr algn="ctr"/>
+          </a:p>
+        </p:txBody>
+      </p:sp>
+      <p:sp>
+        <p:nvSpPr>
+          <p:cNvPr id="20" name="Oval 19"/>
+          <p:cNvSpPr/>
+          <p:nvPr/>
+        </p:nvSpPr>
+        <p:spPr>
+          <a:xfrm>
+            <a:off x="3049200" y="435600"/>
+            <a:ext cx="36000" cy="36000"/>
+          </a:xfrm>
+          <a:prstGeom prst="ellipse">
+            <a:avLst/>
+          </a:prstGeom>
+          <a:solidFill>
+            <a:srgbClr val="E5169B"/>
+          </a:solidFill>
+          <a:ln>
+            <a:noFill/>
+          </a:ln>
+        </p:spPr>
+        <p:txBody>
+          <a:bodyPr rtlCol="0" anchor="ctr"/>
+          <a:lstStyle/>
+          <a:p>
+            <a:pPr algn="ctr"/>
+          </a:p>
+        </p:txBody>
+      </p:sp>
+      <p:sp>
+        <p:nvSpPr>
+          <p:cNvPr id="21" name="Oval 20"/>
+          <p:cNvSpPr/>
+          <p:nvPr/>
+        </p:nvSpPr>
+        <p:spPr>
+          <a:xfrm>
+            <a:off x="3049200" y="536400"/>
+            <a:ext cx="36000" cy="36000"/>
+          </a:xfrm>
+          <a:prstGeom prst="ellipse">
+            <a:avLst/>
+          </a:prstGeom>
+          <a:solidFill>
+            <a:srgbClr val="26292D"/>
+          </a:solidFill>
+          <a:ln>
+            <a:noFill/>
+          </a:ln>
+        </p:spPr>
+        <p:txBody>
+          <a:bodyPr rtlCol="0" anchor="ctr"/>
+          <a:lstStyle/>
+          <a:p>
+            <a:pPr algn="ctr"/>
+          </a:p>
+        </p:txBody>
+      </p:sp>
+      <p:sp>
+        <p:nvSpPr>
+          <p:cNvPr id="22" name="텍스트"/>
           <p:cNvSpPr txBox="1"/>
           <p:nvPr/>
         </p:nvSpPr>
         <p:spPr>
           <a:xfrm>
-            <a:off x="252000" y="201600"/>
-            <a:ext cx="1800000" cy="100800"/>
+            <a:off x="252000" y="223200"/>
+            <a:ext cx="1440000" cy="133351"/>
           </a:xfrm>
           <a:prstGeom prst="rect">
             <a:avLst/>
@@ -3322,13 +3701,13 @@
           <a:p>
             <a:pPr algn="l">
               <a:lnSpc>
-                <a:spcPts val="1087"/>
+                <a:spcPts val="1015"/>
               </a:lnSpc>
             </a:pPr>
             <a:r>
-              <a:rPr sz="750" b="1" spc="150">
+              <a:rPr sz="700" b="1" spc="200">
                 <a:solidFill>
-                  <a:srgbClr val="B3BEBF"/>
+                  <a:srgbClr val="A3A9B5"/>
                 </a:solidFill>
                 <a:latin typeface="맑은 고딕"/>
                 <a:ea typeface="맑은 고딕"/>
@@ -3340,14 +3719,14 @@
       </p:sp>
       <p:sp>
         <p:nvSpPr>
-          <p:cNvPr id="10" name="텍스트"/>
+          <p:cNvPr id="23" name="텍스트"/>
           <p:cNvSpPr txBox="1"/>
           <p:nvPr/>
         </p:nvSpPr>
         <p:spPr>
           <a:xfrm>
-            <a:off x="252000" y="360000"/>
-            <a:ext cx="2016000" cy="313692"/>
+            <a:off x="252000" y="770400"/>
+            <a:ext cx="2016000" cy="360000"/>
           </a:xfrm>
           <a:prstGeom prst="rect">
             <a:avLst/>
@@ -3362,11 +3741,11 @@
           <a:p>
             <a:pPr algn="l">
               <a:lnSpc>
-                <a:spcPts val="2755"/>
+                <a:spcPts val="3190"/>
               </a:lnSpc>
             </a:pPr>
             <a:r>
-              <a:rPr sz="1900" b="1" spc="50">
+              <a:rPr sz="2200" b="1">
                 <a:solidFill>
                   <a:srgbClr val="FFFFFF"/>
                 </a:solidFill>
@@ -3380,14 +3759,14 @@
       </p:sp>
       <p:sp>
         <p:nvSpPr>
-          <p:cNvPr id="11" name="텍스트"/>
+          <p:cNvPr id="24" name="텍스트"/>
           <p:cNvSpPr txBox="1"/>
           <p:nvPr/>
         </p:nvSpPr>
         <p:spPr>
           <a:xfrm>
-            <a:off x="252000" y="655200"/>
-            <a:ext cx="1872000" cy="122400"/>
+            <a:off x="252000" y="1173600"/>
+            <a:ext cx="2016000" cy="171451"/>
           </a:xfrm>
           <a:prstGeom prst="rect">
             <a:avLst/>
@@ -3402,13 +3781,13 @@
           <a:p>
             <a:pPr algn="l">
               <a:lnSpc>
-                <a:spcPts val="1232"/>
+                <a:spcPts val="1305"/>
               </a:lnSpc>
             </a:pPr>
             <a:r>
-              <a:rPr sz="850" b="1">
+              <a:rPr sz="900" b="0">
                 <a:solidFill>
-                  <a:srgbClr val="90B5B8"/>
+                  <a:srgbClr val="A3A9B5"/>
                 </a:solidFill>
                 <a:latin typeface="맑은 고딕"/>
                 <a:ea typeface="맑은 고딕"/>
@@ -3420,43 +3799,14 @@
       </p:sp>
       <p:sp>
         <p:nvSpPr>
-          <p:cNvPr id="12" name="Rectangle 11"/>
-          <p:cNvSpPr/>
-          <p:nvPr/>
-        </p:nvSpPr>
-        <p:spPr>
-          <a:xfrm>
-            <a:off x="252000" y="864000"/>
-            <a:ext cx="230400" cy="14400"/>
-          </a:xfrm>
-          <a:prstGeom prst="rect">
-            <a:avLst/>
-          </a:prstGeom>
-          <a:solidFill>
-            <a:srgbClr val="7DA8AB"/>
-          </a:solidFill>
-          <a:ln>
-            <a:noFill/>
-          </a:ln>
-        </p:spPr>
-        <p:txBody>
-          <a:bodyPr rtlCol="0" anchor="ctr"/>
-          <a:lstStyle/>
-          <a:p>
-            <a:pPr algn="ctr"/>
-          </a:p>
-        </p:txBody>
-      </p:sp>
-      <p:sp>
-        <p:nvSpPr>
-          <p:cNvPr id="13" name="텍스트"/>
+          <p:cNvPr id="25" name="텍스트"/>
           <p:cNvSpPr txBox="1"/>
           <p:nvPr/>
         </p:nvSpPr>
         <p:spPr>
           <a:xfrm>
-            <a:off x="252000" y="1044000"/>
-            <a:ext cx="122400" cy="168911"/>
+            <a:off x="1620000" y="1339200"/>
+            <a:ext cx="1368000" cy="133351"/>
           </a:xfrm>
           <a:prstGeom prst="rect">
             <a:avLst/>
@@ -3469,47 +3819,7 @@
           </a:bodyPr>
           <a:lstStyle/>
           <a:p>
-            <a:pPr algn="l">
-              <a:lnSpc>
-                <a:spcPts val="1015"/>
-              </a:lnSpc>
-            </a:pPr>
-            <a:r>
-              <a:rPr sz="700" b="1">
-                <a:solidFill>
-                  <a:srgbClr val="90B5B8"/>
-                </a:solidFill>
-                <a:latin typeface="맑은 고딕"/>
-                <a:ea typeface="맑은 고딕"/>
-              </a:rPr>
-              <a:t>T</a:t>
-            </a:r>
-          </a:p>
-        </p:txBody>
-      </p:sp>
-      <p:sp>
-        <p:nvSpPr>
-          <p:cNvPr id="14" name="텍스트"/>
-          <p:cNvSpPr txBox="1"/>
-          <p:nvPr/>
-        </p:nvSpPr>
-        <p:spPr>
-          <a:xfrm>
-            <a:off x="396000" y="1044000"/>
-            <a:ext cx="1584000" cy="168911"/>
-          </a:xfrm>
-          <a:prstGeom prst="rect">
-            <a:avLst/>
-          </a:prstGeom>
-          <a:noFill/>
-        </p:spPr>
-        <p:txBody>
-          <a:bodyPr wrap="square" lIns="0" rIns="0" tIns="0" bIns="0" anchor="t">
-            <a:spAutoFit/>
-          </a:bodyPr>
-          <a:lstStyle/>
-          <a:p>
-            <a:pPr algn="l">
+            <a:pPr algn="r">
               <a:lnSpc>
                 <a:spcPts val="1015"/>
               </a:lnSpc>
@@ -3529,14 +3839,14 @@
       </p:sp>
       <p:sp>
         <p:nvSpPr>
-          <p:cNvPr id="15" name="텍스트"/>
+          <p:cNvPr id="26" name="텍스트"/>
           <p:cNvSpPr txBox="1"/>
           <p:nvPr/>
         </p:nvSpPr>
         <p:spPr>
           <a:xfrm>
-            <a:off x="252000" y="1212911"/>
-            <a:ext cx="122400" cy="168911"/>
+            <a:off x="1620000" y="1476000"/>
+            <a:ext cx="1368000" cy="133351"/>
           </a:xfrm>
           <a:prstGeom prst="rect">
             <a:avLst/>
@@ -3549,47 +3859,7 @@
           </a:bodyPr>
           <a:lstStyle/>
           <a:p>
-            <a:pPr algn="l">
-              <a:lnSpc>
-                <a:spcPts val="1015"/>
-              </a:lnSpc>
-            </a:pPr>
-            <a:r>
-              <a:rPr sz="700" b="1">
-                <a:solidFill>
-                  <a:srgbClr val="90B5B8"/>
-                </a:solidFill>
-                <a:latin typeface="맑은 고딕"/>
-                <a:ea typeface="맑은 고딕"/>
-              </a:rPr>
-              <a:t>E</a:t>
-            </a:r>
-          </a:p>
-        </p:txBody>
-      </p:sp>
-      <p:sp>
-        <p:nvSpPr>
-          <p:cNvPr id="16" name="텍스트"/>
-          <p:cNvSpPr txBox="1"/>
-          <p:nvPr/>
-        </p:nvSpPr>
-        <p:spPr>
-          <a:xfrm>
-            <a:off x="396000" y="1212911"/>
-            <a:ext cx="1584000" cy="168911"/>
-          </a:xfrm>
-          <a:prstGeom prst="rect">
-            <a:avLst/>
-          </a:prstGeom>
-          <a:noFill/>
-        </p:spPr>
-        <p:txBody>
-          <a:bodyPr wrap="square" lIns="0" rIns="0" tIns="0" bIns="0" anchor="t">
-            <a:spAutoFit/>
-          </a:bodyPr>
-          <a:lstStyle/>
-          <a:p>
-            <a:pPr algn="l">
+            <a:pPr algn="r">
               <a:lnSpc>
                 <a:spcPts val="1015"/>
               </a:lnSpc>
@@ -3609,14 +3879,14 @@
       </p:sp>
       <p:sp>
         <p:nvSpPr>
-          <p:cNvPr id="17" name="텍스트"/>
+          <p:cNvPr id="27" name="텍스트"/>
           <p:cNvSpPr txBox="1"/>
           <p:nvPr/>
         </p:nvSpPr>
         <p:spPr>
           <a:xfrm>
-            <a:off x="252000" y="1381822"/>
-            <a:ext cx="122400" cy="168911"/>
+            <a:off x="1620000" y="1612800"/>
+            <a:ext cx="1368000" cy="133351"/>
           </a:xfrm>
           <a:prstGeom prst="rect">
             <a:avLst/>
@@ -3629,47 +3899,7 @@
           </a:bodyPr>
           <a:lstStyle/>
           <a:p>
-            <a:pPr algn="l">
-              <a:lnSpc>
-                <a:spcPts val="1015"/>
-              </a:lnSpc>
-            </a:pPr>
-            <a:r>
-              <a:rPr sz="700" b="1">
-                <a:solidFill>
-                  <a:srgbClr val="90B5B8"/>
-                </a:solidFill>
-                <a:latin typeface="맑은 고딕"/>
-                <a:ea typeface="맑은 고딕"/>
-              </a:rPr>
-              <a:t>A</a:t>
-            </a:r>
-          </a:p>
-        </p:txBody>
-      </p:sp>
-      <p:sp>
-        <p:nvSpPr>
-          <p:cNvPr id="18" name="텍스트"/>
-          <p:cNvSpPr txBox="1"/>
-          <p:nvPr/>
-        </p:nvSpPr>
-        <p:spPr>
-          <a:xfrm>
-            <a:off x="396000" y="1381822"/>
-            <a:ext cx="1584000" cy="168911"/>
-          </a:xfrm>
-          <a:prstGeom prst="rect">
-            <a:avLst/>
-          </a:prstGeom>
-          <a:noFill/>
-        </p:spPr>
-        <p:txBody>
-          <a:bodyPr wrap="square" lIns="0" rIns="0" tIns="0" bIns="0" anchor="t">
-            <a:spAutoFit/>
-          </a:bodyPr>
-          <a:lstStyle/>
-          <a:p>
-            <a:pPr algn="l">
+            <a:pPr algn="r">
               <a:lnSpc>
                 <a:spcPts val="1015"/>
               </a:lnSpc>
@@ -3701,7 +3931,7 @@
     <p:bg>
       <p:bgPr>
         <a:solidFill>
-          <a:srgbClr val="F2F7F8"/>
+          <a:srgbClr val="FFFFFF"/>
         </a:solidFill>
         <a:effectLst/>
       </p:bgPr>
@@ -3721,14 +3951,14 @@
         </p:nvSpPr>
         <p:spPr>
           <a:xfrm>
-            <a:off x="0" y="0"/>
-            <a:ext cx="273600" cy="1800000"/>
+            <a:off x="2088000" y="0"/>
+            <a:ext cx="1152000" cy="1800000"/>
           </a:xfrm>
           <a:prstGeom prst="rect">
             <a:avLst/>
           </a:prstGeom>
           <a:solidFill>
-            <a:srgbClr val="4B868B"/>
+            <a:srgbClr val="E5169B"/>
           </a:solidFill>
           <a:ln>
             <a:noFill/>
@@ -3742,121 +3972,45 @@
           </a:p>
         </p:txBody>
       </p:sp>
-      <p:cxnSp>
-        <p:nvCxnSpPr>
-          <p:cNvPr id="3" name="Connector 2"/>
-          <p:cNvCxnSpPr/>
+      <p:sp>
+        <p:nvSpPr>
+          <p:cNvPr id="3" name="Oval 2"/>
+          <p:cNvSpPr/>
           <p:nvPr/>
-        </p:nvCxnSpPr>
-        <p:spPr>
-          <a:xfrm flipH="1">
-            <a:off x="73440" y="196416"/>
-            <a:ext cx="41184" cy="41184"/>
-          </a:xfrm>
-          <a:prstGeom prst="line">
+        </p:nvSpPr>
+        <p:spPr>
+          <a:xfrm>
+            <a:off x="2397600" y="633600"/>
+            <a:ext cx="532800" cy="532800"/>
+          </a:xfrm>
+          <a:prstGeom prst="ellipse">
             <a:avLst/>
           </a:prstGeom>
-          <a:ln w="12672">
+          <a:noFill/>
+          <a:ln w="10800">
             <a:solidFill>
               <a:srgbClr val="FFFFFF"/>
             </a:solidFill>
           </a:ln>
         </p:spPr>
-      </p:cxnSp>
-      <p:cxnSp>
-        <p:nvCxnSpPr>
-          <p:cNvPr id="4" name="Connector 3"/>
-          <p:cNvCxnSpPr/>
-          <p:nvPr/>
-        </p:nvCxnSpPr>
-        <p:spPr>
-          <a:xfrm>
-            <a:off x="73440" y="237600"/>
-            <a:ext cx="41184" cy="41184"/>
-          </a:xfrm>
-          <a:prstGeom prst="line">
-            <a:avLst/>
-          </a:prstGeom>
-          <a:ln w="12672">
-            <a:solidFill>
-              <a:srgbClr val="FFFFFF"/>
-            </a:solidFill>
-          </a:ln>
-        </p:spPr>
-      </p:cxnSp>
-      <p:cxnSp>
-        <p:nvCxnSpPr>
-          <p:cNvPr id="5" name="Connector 4"/>
-          <p:cNvCxnSpPr/>
-          <p:nvPr/>
-        </p:nvCxnSpPr>
-        <p:spPr>
-          <a:xfrm>
-            <a:off x="158976" y="196416"/>
-            <a:ext cx="41184" cy="41184"/>
-          </a:xfrm>
-          <a:prstGeom prst="line">
-            <a:avLst/>
-          </a:prstGeom>
-          <a:ln w="12672">
-            <a:solidFill>
-              <a:srgbClr val="FFFFFF"/>
-            </a:solidFill>
-          </a:ln>
-        </p:spPr>
-      </p:cxnSp>
-      <p:cxnSp>
-        <p:nvCxnSpPr>
-          <p:cNvPr id="6" name="Connector 5"/>
-          <p:cNvCxnSpPr/>
-          <p:nvPr/>
-        </p:nvCxnSpPr>
-        <p:spPr>
-          <a:xfrm flipH="1">
-            <a:off x="158976" y="237600"/>
-            <a:ext cx="41184" cy="41184"/>
-          </a:xfrm>
-          <a:prstGeom prst="line">
-            <a:avLst/>
-          </a:prstGeom>
-          <a:ln w="12672">
-            <a:solidFill>
-              <a:srgbClr val="FFFFFF"/>
-            </a:solidFill>
-          </a:ln>
-        </p:spPr>
-      </p:cxnSp>
-      <p:cxnSp>
-        <p:nvCxnSpPr>
-          <p:cNvPr id="7" name="Connector 6"/>
-          <p:cNvCxnSpPr/>
-          <p:nvPr/>
-        </p:nvCxnSpPr>
-        <p:spPr>
-          <a:xfrm flipH="1">
-            <a:off x="124128" y="183744"/>
-            <a:ext cx="25344" cy="107712"/>
-          </a:xfrm>
-          <a:prstGeom prst="line">
-            <a:avLst/>
-          </a:prstGeom>
-          <a:ln w="11088">
-            <a:solidFill>
-              <a:srgbClr val="808080"/>
-            </a:solidFill>
-          </a:ln>
-        </p:spPr>
-      </p:cxnSp>
-      <p:sp>
-        <p:nvSpPr>
-          <p:cNvPr id="8" name="텍스트"/>
+        <p:txBody>
+          <a:bodyPr rtlCol="0" anchor="ctr"/>
+          <a:lstStyle/>
+          <a:p>
+            <a:pPr algn="ctr"/>
+          </a:p>
+        </p:txBody>
+      </p:sp>
+      <p:sp>
+        <p:nvSpPr>
+          <p:cNvPr id="4" name="텍스트"/>
           <p:cNvSpPr txBox="1"/>
           <p:nvPr/>
         </p:nvSpPr>
         <p:spPr>
           <a:xfrm>
-            <a:off x="504000" y="396000"/>
-            <a:ext cx="1800000" cy="720000"/>
+            <a:off x="2304000" y="684000"/>
+            <a:ext cx="720000" cy="432000"/>
           </a:xfrm>
           <a:prstGeom prst="rect">
             <a:avLst/>
@@ -3869,34 +4023,34 @@
           </a:bodyPr>
           <a:lstStyle/>
           <a:p>
-            <a:pPr algn="l">
+            <a:pPr algn="ctr">
               <a:lnSpc>
-                <a:spcPts val="1667"/>
+                <a:spcPts val="4350"/>
               </a:lnSpc>
             </a:pPr>
             <a:r>
-              <a:rPr sz="1150" b="1">
+              <a:rPr sz="3000" b="1">
                 <a:solidFill>
-                  <a:srgbClr val="274649"/>
+                  <a:srgbClr val="FFFFFF"/>
                 </a:solidFill>
-                <a:latin typeface="바탕"/>
-                <a:ea typeface="바탕"/>
+                <a:latin typeface="맑은 고딕"/>
+                <a:ea typeface="맑은 고딕"/>
               </a:rPr>
-              <a:t>처음 만난 날처럼 한결같이</a:t>
-            </a:r>
-          </a:p>
-        </p:txBody>
-      </p:sp>
-      <p:sp>
-        <p:nvSpPr>
-          <p:cNvPr id="9" name="텍스트"/>
+              <a:t>회</a:t>
+            </a:r>
+          </a:p>
+        </p:txBody>
+      </p:sp>
+      <p:sp>
+        <p:nvSpPr>
+          <p:cNvPr id="5" name="텍스트"/>
           <p:cNvSpPr txBox="1"/>
           <p:nvPr/>
         </p:nvSpPr>
         <p:spPr>
           <a:xfrm>
-            <a:off x="504000" y="1260000"/>
-            <a:ext cx="1728000" cy="108000"/>
+            <a:off x="252000" y="540000"/>
+            <a:ext cx="1620000" cy="720000"/>
           </a:xfrm>
           <a:prstGeom prst="rect">
             <a:avLst/>
@@ -3911,88 +4065,75 @@
           <a:p>
             <a:pPr algn="l">
               <a:lnSpc>
-                <a:spcPts val="1087"/>
+                <a:spcPts val="1739"/>
               </a:lnSpc>
             </a:pPr>
             <a:r>
-              <a:rPr sz="750" b="1" spc="200">
+              <a:rPr sz="1200" b="1">
                 <a:solidFill>
-                  <a:srgbClr val="5E7072"/>
+                  <a:srgbClr val="12151C"/>
+                </a:solidFill>
+                <a:latin typeface="맑은 고딕"/>
+                <a:ea typeface="맑은 고딕"/>
+              </a:rPr>
+              <a:t>처음 만난</a:t>
+            </a:r>
+          </a:p>
+          <a:p>
+            <a:pPr algn="l">
+              <a:lnSpc>
+                <a:spcPts val="1739"/>
+              </a:lnSpc>
+            </a:pPr>
+            <a:r>
+              <a:rPr sz="1200" b="1">
+                <a:solidFill>
+                  <a:srgbClr val="12151C"/>
+                </a:solidFill>
+                <a:latin typeface="맑은 고딕"/>
+                <a:ea typeface="맑은 고딕"/>
+              </a:rPr>
+              <a:t>날처럼 한결같이</a:t>
+            </a:r>
+          </a:p>
+        </p:txBody>
+      </p:sp>
+      <p:sp>
+        <p:nvSpPr>
+          <p:cNvPr id="6" name="텍스트"/>
+          <p:cNvSpPr txBox="1"/>
+          <p:nvPr/>
+        </p:nvSpPr>
+        <p:spPr>
+          <a:xfrm>
+            <a:off x="252000" y="1512000"/>
+            <a:ext cx="1584000" cy="123826"/>
+          </a:xfrm>
+          <a:prstGeom prst="rect">
+            <a:avLst/>
+          </a:prstGeom>
+          <a:noFill/>
+        </p:spPr>
+        <p:txBody>
+          <a:bodyPr wrap="square" lIns="0" rIns="0" tIns="0" bIns="0" anchor="t">
+            <a:spAutoFit/>
+          </a:bodyPr>
+          <a:lstStyle/>
+          <a:p>
+            <a:pPr algn="l">
+              <a:lnSpc>
+                <a:spcPts val="942"/>
+              </a:lnSpc>
+            </a:pPr>
+            <a:r>
+              <a:rPr sz="650" b="1" spc="200">
+                <a:solidFill>
+                  <a:srgbClr val="6B7280"/>
                 </a:solidFill>
                 <a:latin typeface="맑은 고딕"/>
                 <a:ea typeface="맑은 고딕"/>
               </a:rPr>
               <a:t>회사명 · 부서명</a:t>
-            </a:r>
-          </a:p>
-        </p:txBody>
-      </p:sp>
-      <p:sp>
-        <p:nvSpPr>
-          <p:cNvPr id="10" name="Rectangle 9"/>
-          <p:cNvSpPr/>
-          <p:nvPr/>
-        </p:nvSpPr>
-        <p:spPr>
-          <a:xfrm>
-            <a:off x="2520000" y="216000"/>
-            <a:ext cx="468000" cy="468000"/>
-          </a:xfrm>
-          <a:prstGeom prst="rect">
-            <a:avLst/>
-          </a:prstGeom>
-          <a:noFill/>
-          <a:ln w="9000">
-            <a:solidFill>
-              <a:srgbClr val="4B868B"/>
-            </a:solidFill>
-            <a:prstDash val="dash"/>
-          </a:ln>
-        </p:spPr>
-        <p:txBody>
-          <a:bodyPr rtlCol="0" anchor="ctr"/>
-          <a:lstStyle/>
-          <a:p>
-            <a:pPr algn="ctr"/>
-          </a:p>
-        </p:txBody>
-      </p:sp>
-      <p:sp>
-        <p:nvSpPr>
-          <p:cNvPr id="11" name="텍스트"/>
-          <p:cNvSpPr txBox="1"/>
-          <p:nvPr/>
-        </p:nvSpPr>
-        <p:spPr>
-          <a:xfrm>
-            <a:off x="2520000" y="216000"/>
-            <a:ext cx="468000" cy="468000"/>
-          </a:xfrm>
-          <a:prstGeom prst="rect">
-            <a:avLst/>
-          </a:prstGeom>
-          <a:noFill/>
-        </p:spPr>
-        <p:txBody>
-          <a:bodyPr wrap="square" lIns="0" rIns="0" tIns="0" bIns="0" anchor="ctr">
-            <a:spAutoFit/>
-          </a:bodyPr>
-          <a:lstStyle/>
-          <a:p>
-            <a:pPr algn="ctr">
-              <a:lnSpc>
-                <a:spcPts val="1305"/>
-              </a:lnSpc>
-            </a:pPr>
-            <a:r>
-              <a:rPr sz="900" b="1">
-                <a:solidFill>
-                  <a:srgbClr val="5E7072"/>
-                </a:solidFill>
-                <a:latin typeface="맑은 고딕"/>
-                <a:ea typeface="맑은 고딕"/>
-              </a:rPr>
-              <a:t>QR</a:t>
             </a:r>
           </a:p>
         </p:txBody>

--- a/public/fun/cards/office/office-24.pptx
+++ b/public/fun/cards/office/office-24.pptx
@@ -3099,16 +3099,45 @@
       <p:grpSpPr/>
       <p:sp>
         <p:nvSpPr>
-          <p:cNvPr id="2" name="Oval 1"/>
+          <p:cNvPr id="2" name="Rectangle 1"/>
           <p:cNvSpPr/>
           <p:nvPr/>
         </p:nvSpPr>
         <p:spPr>
           <a:xfrm>
-            <a:off x="2646000" y="234000"/>
-            <a:ext cx="36000" cy="36000"/>
-          </a:xfrm>
-          <a:prstGeom prst="ellipse">
+            <a:off x="0" y="1296000"/>
+            <a:ext cx="3240000" cy="504000"/>
+          </a:xfrm>
+          <a:prstGeom prst="rect">
+            <a:avLst/>
+          </a:prstGeom>
+          <a:solidFill>
+            <a:srgbClr val="26292D"/>
+          </a:solidFill>
+          <a:ln>
+            <a:noFill/>
+          </a:ln>
+        </p:spPr>
+        <p:txBody>
+          <a:bodyPr rtlCol="0" anchor="ctr"/>
+          <a:lstStyle/>
+          <a:p>
+            <a:pPr algn="ctr"/>
+          </a:p>
+        </p:txBody>
+      </p:sp>
+      <p:sp>
+        <p:nvSpPr>
+          <p:cNvPr id="3" name="Rectangle 2"/>
+          <p:cNvSpPr/>
+          <p:nvPr/>
+        </p:nvSpPr>
+        <p:spPr>
+          <a:xfrm>
+            <a:off x="0" y="1296000"/>
+            <a:ext cx="3240000" cy="14400"/>
+          </a:xfrm>
+          <a:prstGeom prst="rect">
             <a:avLst/>
           </a:prstGeom>
           <a:solidFill>
@@ -3128,565 +3157,14 @@
       </p:sp>
       <p:sp>
         <p:nvSpPr>
-          <p:cNvPr id="3" name="Oval 2"/>
-          <p:cNvSpPr/>
+          <p:cNvPr id="4" name="텍스트"/>
+          <p:cNvSpPr txBox="1"/>
           <p:nvPr/>
         </p:nvSpPr>
         <p:spPr>
           <a:xfrm>
-            <a:off x="2646000" y="334800"/>
-            <a:ext cx="36000" cy="36000"/>
-          </a:xfrm>
-          <a:prstGeom prst="ellipse">
-            <a:avLst/>
-          </a:prstGeom>
-          <a:solidFill>
-            <a:srgbClr val="26292D"/>
-          </a:solidFill>
-          <a:ln>
-            <a:noFill/>
-          </a:ln>
-        </p:spPr>
-        <p:txBody>
-          <a:bodyPr rtlCol="0" anchor="ctr"/>
-          <a:lstStyle/>
-          <a:p>
-            <a:pPr algn="ctr"/>
-          </a:p>
-        </p:txBody>
-      </p:sp>
-      <p:sp>
-        <p:nvSpPr>
-          <p:cNvPr id="4" name="Oval 3"/>
-          <p:cNvSpPr/>
-          <p:nvPr/>
-        </p:nvSpPr>
-        <p:spPr>
-          <a:xfrm>
-            <a:off x="2646000" y="435600"/>
-            <a:ext cx="36000" cy="36000"/>
-          </a:xfrm>
-          <a:prstGeom prst="ellipse">
-            <a:avLst/>
-          </a:prstGeom>
-          <a:solidFill>
-            <a:srgbClr val="26292D"/>
-          </a:solidFill>
-          <a:ln>
-            <a:noFill/>
-          </a:ln>
-        </p:spPr>
-        <p:txBody>
-          <a:bodyPr rtlCol="0" anchor="ctr"/>
-          <a:lstStyle/>
-          <a:p>
-            <a:pPr algn="ctr"/>
-          </a:p>
-        </p:txBody>
-      </p:sp>
-      <p:sp>
-        <p:nvSpPr>
-          <p:cNvPr id="5" name="Oval 4"/>
-          <p:cNvSpPr/>
-          <p:nvPr/>
-        </p:nvSpPr>
-        <p:spPr>
-          <a:xfrm>
-            <a:off x="2646000" y="536400"/>
-            <a:ext cx="36000" cy="36000"/>
-          </a:xfrm>
-          <a:prstGeom prst="ellipse">
-            <a:avLst/>
-          </a:prstGeom>
-          <a:solidFill>
-            <a:srgbClr val="E5169B"/>
-          </a:solidFill>
-          <a:ln>
-            <a:noFill/>
-          </a:ln>
-        </p:spPr>
-        <p:txBody>
-          <a:bodyPr rtlCol="0" anchor="ctr"/>
-          <a:lstStyle/>
-          <a:p>
-            <a:pPr algn="ctr"/>
-          </a:p>
-        </p:txBody>
-      </p:sp>
-      <p:sp>
-        <p:nvSpPr>
-          <p:cNvPr id="6" name="Oval 5"/>
-          <p:cNvSpPr/>
-          <p:nvPr/>
-        </p:nvSpPr>
-        <p:spPr>
-          <a:xfrm>
-            <a:off x="2746800" y="234000"/>
-            <a:ext cx="36000" cy="36000"/>
-          </a:xfrm>
-          <a:prstGeom prst="ellipse">
-            <a:avLst/>
-          </a:prstGeom>
-          <a:solidFill>
-            <a:srgbClr val="26292D"/>
-          </a:solidFill>
-          <a:ln>
-            <a:noFill/>
-          </a:ln>
-        </p:spPr>
-        <p:txBody>
-          <a:bodyPr rtlCol="0" anchor="ctr"/>
-          <a:lstStyle/>
-          <a:p>
-            <a:pPr algn="ctr"/>
-          </a:p>
-        </p:txBody>
-      </p:sp>
-      <p:sp>
-        <p:nvSpPr>
-          <p:cNvPr id="7" name="Oval 6"/>
-          <p:cNvSpPr/>
-          <p:nvPr/>
-        </p:nvSpPr>
-        <p:spPr>
-          <a:xfrm>
-            <a:off x="2746800" y="334800"/>
-            <a:ext cx="36000" cy="36000"/>
-          </a:xfrm>
-          <a:prstGeom prst="ellipse">
-            <a:avLst/>
-          </a:prstGeom>
-          <a:solidFill>
-            <a:srgbClr val="26292D"/>
-          </a:solidFill>
-          <a:ln>
-            <a:noFill/>
-          </a:ln>
-        </p:spPr>
-        <p:txBody>
-          <a:bodyPr rtlCol="0" anchor="ctr"/>
-          <a:lstStyle/>
-          <a:p>
-            <a:pPr algn="ctr"/>
-          </a:p>
-        </p:txBody>
-      </p:sp>
-      <p:sp>
-        <p:nvSpPr>
-          <p:cNvPr id="8" name="Oval 7"/>
-          <p:cNvSpPr/>
-          <p:nvPr/>
-        </p:nvSpPr>
-        <p:spPr>
-          <a:xfrm>
-            <a:off x="2746800" y="435600"/>
-            <a:ext cx="36000" cy="36000"/>
-          </a:xfrm>
-          <a:prstGeom prst="ellipse">
-            <a:avLst/>
-          </a:prstGeom>
-          <a:solidFill>
-            <a:srgbClr val="E5169B"/>
-          </a:solidFill>
-          <a:ln>
-            <a:noFill/>
-          </a:ln>
-        </p:spPr>
-        <p:txBody>
-          <a:bodyPr rtlCol="0" anchor="ctr"/>
-          <a:lstStyle/>
-          <a:p>
-            <a:pPr algn="ctr"/>
-          </a:p>
-        </p:txBody>
-      </p:sp>
-      <p:sp>
-        <p:nvSpPr>
-          <p:cNvPr id="9" name="Oval 8"/>
-          <p:cNvSpPr/>
-          <p:nvPr/>
-        </p:nvSpPr>
-        <p:spPr>
-          <a:xfrm>
-            <a:off x="2746800" y="536400"/>
-            <a:ext cx="36000" cy="36000"/>
-          </a:xfrm>
-          <a:prstGeom prst="ellipse">
-            <a:avLst/>
-          </a:prstGeom>
-          <a:solidFill>
-            <a:srgbClr val="26292D"/>
-          </a:solidFill>
-          <a:ln>
-            <a:noFill/>
-          </a:ln>
-        </p:spPr>
-        <p:txBody>
-          <a:bodyPr rtlCol="0" anchor="ctr"/>
-          <a:lstStyle/>
-          <a:p>
-            <a:pPr algn="ctr"/>
-          </a:p>
-        </p:txBody>
-      </p:sp>
-      <p:sp>
-        <p:nvSpPr>
-          <p:cNvPr id="10" name="Oval 9"/>
-          <p:cNvSpPr/>
-          <p:nvPr/>
-        </p:nvSpPr>
-        <p:spPr>
-          <a:xfrm>
-            <a:off x="2847600" y="234000"/>
-            <a:ext cx="36000" cy="36000"/>
-          </a:xfrm>
-          <a:prstGeom prst="ellipse">
-            <a:avLst/>
-          </a:prstGeom>
-          <a:solidFill>
-            <a:srgbClr val="26292D"/>
-          </a:solidFill>
-          <a:ln>
-            <a:noFill/>
-          </a:ln>
-        </p:spPr>
-        <p:txBody>
-          <a:bodyPr rtlCol="0" anchor="ctr"/>
-          <a:lstStyle/>
-          <a:p>
-            <a:pPr algn="ctr"/>
-          </a:p>
-        </p:txBody>
-      </p:sp>
-      <p:sp>
-        <p:nvSpPr>
-          <p:cNvPr id="11" name="Oval 10"/>
-          <p:cNvSpPr/>
-          <p:nvPr/>
-        </p:nvSpPr>
-        <p:spPr>
-          <a:xfrm>
-            <a:off x="2847600" y="334800"/>
-            <a:ext cx="36000" cy="36000"/>
-          </a:xfrm>
-          <a:prstGeom prst="ellipse">
-            <a:avLst/>
-          </a:prstGeom>
-          <a:solidFill>
-            <a:srgbClr val="E5169B"/>
-          </a:solidFill>
-          <a:ln>
-            <a:noFill/>
-          </a:ln>
-        </p:spPr>
-        <p:txBody>
-          <a:bodyPr rtlCol="0" anchor="ctr"/>
-          <a:lstStyle/>
-          <a:p>
-            <a:pPr algn="ctr"/>
-          </a:p>
-        </p:txBody>
-      </p:sp>
-      <p:sp>
-        <p:nvSpPr>
-          <p:cNvPr id="12" name="Oval 11"/>
-          <p:cNvSpPr/>
-          <p:nvPr/>
-        </p:nvSpPr>
-        <p:spPr>
-          <a:xfrm>
-            <a:off x="2847600" y="435600"/>
-            <a:ext cx="36000" cy="36000"/>
-          </a:xfrm>
-          <a:prstGeom prst="ellipse">
-            <a:avLst/>
-          </a:prstGeom>
-          <a:solidFill>
-            <a:srgbClr val="26292D"/>
-          </a:solidFill>
-          <a:ln>
-            <a:noFill/>
-          </a:ln>
-        </p:spPr>
-        <p:txBody>
-          <a:bodyPr rtlCol="0" anchor="ctr"/>
-          <a:lstStyle/>
-          <a:p>
-            <a:pPr algn="ctr"/>
-          </a:p>
-        </p:txBody>
-      </p:sp>
-      <p:sp>
-        <p:nvSpPr>
-          <p:cNvPr id="13" name="Oval 12"/>
-          <p:cNvSpPr/>
-          <p:nvPr/>
-        </p:nvSpPr>
-        <p:spPr>
-          <a:xfrm>
-            <a:off x="2847600" y="536400"/>
-            <a:ext cx="36000" cy="36000"/>
-          </a:xfrm>
-          <a:prstGeom prst="ellipse">
-            <a:avLst/>
-          </a:prstGeom>
-          <a:solidFill>
-            <a:srgbClr val="26292D"/>
-          </a:solidFill>
-          <a:ln>
-            <a:noFill/>
-          </a:ln>
-        </p:spPr>
-        <p:txBody>
-          <a:bodyPr rtlCol="0" anchor="ctr"/>
-          <a:lstStyle/>
-          <a:p>
-            <a:pPr algn="ctr"/>
-          </a:p>
-        </p:txBody>
-      </p:sp>
-      <p:sp>
-        <p:nvSpPr>
-          <p:cNvPr id="14" name="Oval 13"/>
-          <p:cNvSpPr/>
-          <p:nvPr/>
-        </p:nvSpPr>
-        <p:spPr>
-          <a:xfrm>
-            <a:off x="2948400" y="234000"/>
-            <a:ext cx="36000" cy="36000"/>
-          </a:xfrm>
-          <a:prstGeom prst="ellipse">
-            <a:avLst/>
-          </a:prstGeom>
-          <a:solidFill>
-            <a:srgbClr val="E5169B"/>
-          </a:solidFill>
-          <a:ln>
-            <a:noFill/>
-          </a:ln>
-        </p:spPr>
-        <p:txBody>
-          <a:bodyPr rtlCol="0" anchor="ctr"/>
-          <a:lstStyle/>
-          <a:p>
-            <a:pPr algn="ctr"/>
-          </a:p>
-        </p:txBody>
-      </p:sp>
-      <p:sp>
-        <p:nvSpPr>
-          <p:cNvPr id="15" name="Oval 14"/>
-          <p:cNvSpPr/>
-          <p:nvPr/>
-        </p:nvSpPr>
-        <p:spPr>
-          <a:xfrm>
-            <a:off x="2948400" y="334800"/>
-            <a:ext cx="36000" cy="36000"/>
-          </a:xfrm>
-          <a:prstGeom prst="ellipse">
-            <a:avLst/>
-          </a:prstGeom>
-          <a:solidFill>
-            <a:srgbClr val="26292D"/>
-          </a:solidFill>
-          <a:ln>
-            <a:noFill/>
-          </a:ln>
-        </p:spPr>
-        <p:txBody>
-          <a:bodyPr rtlCol="0" anchor="ctr"/>
-          <a:lstStyle/>
-          <a:p>
-            <a:pPr algn="ctr"/>
-          </a:p>
-        </p:txBody>
-      </p:sp>
-      <p:sp>
-        <p:nvSpPr>
-          <p:cNvPr id="16" name="Oval 15"/>
-          <p:cNvSpPr/>
-          <p:nvPr/>
-        </p:nvSpPr>
-        <p:spPr>
-          <a:xfrm>
-            <a:off x="2948400" y="435600"/>
-            <a:ext cx="36000" cy="36000"/>
-          </a:xfrm>
-          <a:prstGeom prst="ellipse">
-            <a:avLst/>
-          </a:prstGeom>
-          <a:solidFill>
-            <a:srgbClr val="26292D"/>
-          </a:solidFill>
-          <a:ln>
-            <a:noFill/>
-          </a:ln>
-        </p:spPr>
-        <p:txBody>
-          <a:bodyPr rtlCol="0" anchor="ctr"/>
-          <a:lstStyle/>
-          <a:p>
-            <a:pPr algn="ctr"/>
-          </a:p>
-        </p:txBody>
-      </p:sp>
-      <p:sp>
-        <p:nvSpPr>
-          <p:cNvPr id="17" name="Oval 16"/>
-          <p:cNvSpPr/>
-          <p:nvPr/>
-        </p:nvSpPr>
-        <p:spPr>
-          <a:xfrm>
-            <a:off x="2948400" y="536400"/>
-            <a:ext cx="36000" cy="36000"/>
-          </a:xfrm>
-          <a:prstGeom prst="ellipse">
-            <a:avLst/>
-          </a:prstGeom>
-          <a:solidFill>
-            <a:srgbClr val="E5169B"/>
-          </a:solidFill>
-          <a:ln>
-            <a:noFill/>
-          </a:ln>
-        </p:spPr>
-        <p:txBody>
-          <a:bodyPr rtlCol="0" anchor="ctr"/>
-          <a:lstStyle/>
-          <a:p>
-            <a:pPr algn="ctr"/>
-          </a:p>
-        </p:txBody>
-      </p:sp>
-      <p:sp>
-        <p:nvSpPr>
-          <p:cNvPr id="18" name="Oval 17"/>
-          <p:cNvSpPr/>
-          <p:nvPr/>
-        </p:nvSpPr>
-        <p:spPr>
-          <a:xfrm>
-            <a:off x="3049200" y="234000"/>
-            <a:ext cx="36000" cy="36000"/>
-          </a:xfrm>
-          <a:prstGeom prst="ellipse">
-            <a:avLst/>
-          </a:prstGeom>
-          <a:solidFill>
-            <a:srgbClr val="26292D"/>
-          </a:solidFill>
-          <a:ln>
-            <a:noFill/>
-          </a:ln>
-        </p:spPr>
-        <p:txBody>
-          <a:bodyPr rtlCol="0" anchor="ctr"/>
-          <a:lstStyle/>
-          <a:p>
-            <a:pPr algn="ctr"/>
-          </a:p>
-        </p:txBody>
-      </p:sp>
-      <p:sp>
-        <p:nvSpPr>
-          <p:cNvPr id="19" name="Oval 18"/>
-          <p:cNvSpPr/>
-          <p:nvPr/>
-        </p:nvSpPr>
-        <p:spPr>
-          <a:xfrm>
-            <a:off x="3049200" y="334800"/>
-            <a:ext cx="36000" cy="36000"/>
-          </a:xfrm>
-          <a:prstGeom prst="ellipse">
-            <a:avLst/>
-          </a:prstGeom>
-          <a:solidFill>
-            <a:srgbClr val="26292D"/>
-          </a:solidFill>
-          <a:ln>
-            <a:noFill/>
-          </a:ln>
-        </p:spPr>
-        <p:txBody>
-          <a:bodyPr rtlCol="0" anchor="ctr"/>
-          <a:lstStyle/>
-          <a:p>
-            <a:pPr algn="ctr"/>
-          </a:p>
-        </p:txBody>
-      </p:sp>
-      <p:sp>
-        <p:nvSpPr>
-          <p:cNvPr id="20" name="Oval 19"/>
-          <p:cNvSpPr/>
-          <p:nvPr/>
-        </p:nvSpPr>
-        <p:spPr>
-          <a:xfrm>
-            <a:off x="3049200" y="435600"/>
-            <a:ext cx="36000" cy="36000"/>
-          </a:xfrm>
-          <a:prstGeom prst="ellipse">
-            <a:avLst/>
-          </a:prstGeom>
-          <a:solidFill>
-            <a:srgbClr val="E5169B"/>
-          </a:solidFill>
-          <a:ln>
-            <a:noFill/>
-          </a:ln>
-        </p:spPr>
-        <p:txBody>
-          <a:bodyPr rtlCol="0" anchor="ctr"/>
-          <a:lstStyle/>
-          <a:p>
-            <a:pPr algn="ctr"/>
-          </a:p>
-        </p:txBody>
-      </p:sp>
-      <p:sp>
-        <p:nvSpPr>
-          <p:cNvPr id="21" name="Oval 20"/>
-          <p:cNvSpPr/>
-          <p:nvPr/>
-        </p:nvSpPr>
-        <p:spPr>
-          <a:xfrm>
-            <a:off x="3049200" y="536400"/>
-            <a:ext cx="36000" cy="36000"/>
-          </a:xfrm>
-          <a:prstGeom prst="ellipse">
-            <a:avLst/>
-          </a:prstGeom>
-          <a:solidFill>
-            <a:srgbClr val="26292D"/>
-          </a:solidFill>
-          <a:ln>
-            <a:noFill/>
-          </a:ln>
-        </p:spPr>
-        <p:txBody>
-          <a:bodyPr rtlCol="0" anchor="ctr"/>
-          <a:lstStyle/>
-          <a:p>
-            <a:pPr algn="ctr"/>
-          </a:p>
-        </p:txBody>
-      </p:sp>
-      <p:sp>
-        <p:nvSpPr>
-          <p:cNvPr id="22" name="텍스트"/>
-          <p:cNvSpPr txBox="1"/>
-          <p:nvPr/>
-        </p:nvSpPr>
-        <p:spPr>
-          <a:xfrm>
-            <a:off x="252000" y="223200"/>
-            <a:ext cx="1440000" cy="133351"/>
+            <a:off x="252000" y="252000"/>
+            <a:ext cx="1512000" cy="123826"/>
           </a:xfrm>
           <a:prstGeom prst="rect">
             <a:avLst/>
@@ -3701,11 +3179,11 @@
           <a:p>
             <a:pPr algn="l">
               <a:lnSpc>
-                <a:spcPts val="1015"/>
+                <a:spcPts val="942"/>
               </a:lnSpc>
             </a:pPr>
             <a:r>
-              <a:rPr sz="700" b="1" spc="200">
+              <a:rPr sz="650" b="1" spc="220">
                 <a:solidFill>
                   <a:srgbClr val="A3A9B5"/>
                 </a:solidFill>
@@ -3719,14 +3197,14 @@
       </p:sp>
       <p:sp>
         <p:nvSpPr>
-          <p:cNvPr id="23" name="텍스트"/>
+          <p:cNvPr id="5" name="텍스트"/>
           <p:cNvSpPr txBox="1"/>
           <p:nvPr/>
         </p:nvSpPr>
         <p:spPr>
           <a:xfrm>
-            <a:off x="252000" y="770400"/>
-            <a:ext cx="2016000" cy="360000"/>
+            <a:off x="252000" y="576000"/>
+            <a:ext cx="1800000" cy="237600"/>
           </a:xfrm>
           <a:prstGeom prst="rect">
             <a:avLst/>
@@ -3741,11 +3219,11 @@
           <a:p>
             <a:pPr algn="l">
               <a:lnSpc>
-                <a:spcPts val="3190"/>
+                <a:spcPts val="1957"/>
               </a:lnSpc>
             </a:pPr>
             <a:r>
-              <a:rPr sz="2200" b="1">
+              <a:rPr sz="1350" b="1" spc="120">
                 <a:solidFill>
                   <a:srgbClr val="FFFFFF"/>
                 </a:solidFill>
@@ -3759,14 +3237,14 @@
       </p:sp>
       <p:sp>
         <p:nvSpPr>
-          <p:cNvPr id="24" name="텍스트"/>
+          <p:cNvPr id="6" name="텍스트"/>
           <p:cNvSpPr txBox="1"/>
           <p:nvPr/>
         </p:nvSpPr>
         <p:spPr>
           <a:xfrm>
-            <a:off x="252000" y="1173600"/>
-            <a:ext cx="2016000" cy="171451"/>
+            <a:off x="252000" y="828000"/>
+            <a:ext cx="1800000" cy="133351"/>
           </a:xfrm>
           <a:prstGeom prst="rect">
             <a:avLst/>
@@ -3781,11 +3259,11 @@
           <a:p>
             <a:pPr algn="l">
               <a:lnSpc>
-                <a:spcPts val="1305"/>
+                <a:spcPts val="1015"/>
               </a:lnSpc>
             </a:pPr>
             <a:r>
-              <a:rPr sz="900" b="0">
+              <a:rPr sz="700" b="0" spc="60">
                 <a:solidFill>
                   <a:srgbClr val="A3A9B5"/>
                 </a:solidFill>
@@ -3799,14 +3277,14 @@
       </p:sp>
       <p:sp>
         <p:nvSpPr>
-          <p:cNvPr id="25" name="텍스트"/>
+          <p:cNvPr id="7" name="텍스트"/>
           <p:cNvSpPr txBox="1"/>
           <p:nvPr/>
         </p:nvSpPr>
         <p:spPr>
           <a:xfrm>
-            <a:off x="1620000" y="1339200"/>
-            <a:ext cx="1368000" cy="133351"/>
+            <a:off x="252000" y="1411200"/>
+            <a:ext cx="900000" cy="91441"/>
           </a:xfrm>
           <a:prstGeom prst="rect">
             <a:avLst/>
@@ -3819,13 +3297,53 @@
           </a:bodyPr>
           <a:lstStyle/>
           <a:p>
-            <a:pPr algn="r">
+            <a:pPr algn="l">
               <a:lnSpc>
-                <a:spcPts val="1015"/>
+                <a:spcPts val="696"/>
               </a:lnSpc>
             </a:pPr>
             <a:r>
-              <a:rPr sz="700" b="0">
+              <a:rPr sz="480" b="1" spc="140">
+                <a:solidFill>
+                  <a:srgbClr val="A3A9B5"/>
+                </a:solidFill>
+                <a:latin typeface="맑은 고딕"/>
+                <a:ea typeface="맑은 고딕"/>
+              </a:rPr>
+              <a:t>TEL</a:t>
+            </a:r>
+          </a:p>
+        </p:txBody>
+      </p:sp>
+      <p:sp>
+        <p:nvSpPr>
+          <p:cNvPr id="8" name="텍스트"/>
+          <p:cNvSpPr txBox="1"/>
+          <p:nvPr/>
+        </p:nvSpPr>
+        <p:spPr>
+          <a:xfrm>
+            <a:off x="252000" y="1512000"/>
+            <a:ext cx="900000" cy="120016"/>
+          </a:xfrm>
+          <a:prstGeom prst="rect">
+            <a:avLst/>
+          </a:prstGeom>
+          <a:noFill/>
+        </p:spPr>
+        <p:txBody>
+          <a:bodyPr wrap="square" lIns="0" rIns="0" tIns="0" bIns="0" anchor="t">
+            <a:spAutoFit/>
+          </a:bodyPr>
+          <a:lstStyle/>
+          <a:p>
+            <a:pPr algn="l">
+              <a:lnSpc>
+                <a:spcPts val="913"/>
+              </a:lnSpc>
+            </a:pPr>
+            <a:r>
+              <a:rPr sz="630" b="0">
                 <a:solidFill>
                   <a:srgbClr val="FFFFFF"/>
                 </a:solidFill>
@@ -3837,16 +3355,37 @@
           </a:p>
         </p:txBody>
       </p:sp>
-      <p:sp>
-        <p:nvSpPr>
-          <p:cNvPr id="26" name="텍스트"/>
+      <p:cxnSp>
+        <p:nvCxnSpPr>
+          <p:cNvPr id="9" name="Connector 8"/>
+          <p:cNvCxnSpPr/>
+          <p:nvPr/>
+        </p:nvCxnSpPr>
+        <p:spPr>
+          <a:xfrm>
+            <a:off x="1072800" y="1411200"/>
+            <a:ext cx="0" cy="201600"/>
+          </a:xfrm>
+          <a:prstGeom prst="line">
+            <a:avLst/>
+          </a:prstGeom>
+          <a:ln w="3600">
+            <a:solidFill>
+              <a:srgbClr val="2A2F38"/>
+            </a:solidFill>
+          </a:ln>
+        </p:spPr>
+      </p:cxnSp>
+      <p:sp>
+        <p:nvSpPr>
+          <p:cNvPr id="10" name="텍스트"/>
           <p:cNvSpPr txBox="1"/>
           <p:nvPr/>
         </p:nvSpPr>
         <p:spPr>
           <a:xfrm>
-            <a:off x="1620000" y="1476000"/>
-            <a:ext cx="1368000" cy="133351"/>
+            <a:off x="1152000" y="1411200"/>
+            <a:ext cx="1008000" cy="91441"/>
           </a:xfrm>
           <a:prstGeom prst="rect">
             <a:avLst/>
@@ -3859,13 +3398,53 @@
           </a:bodyPr>
           <a:lstStyle/>
           <a:p>
-            <a:pPr algn="r">
+            <a:pPr algn="l">
               <a:lnSpc>
-                <a:spcPts val="1015"/>
+                <a:spcPts val="696"/>
               </a:lnSpc>
             </a:pPr>
             <a:r>
-              <a:rPr sz="700" b="0">
+              <a:rPr sz="480" b="1" spc="140">
+                <a:solidFill>
+                  <a:srgbClr val="A3A9B5"/>
+                </a:solidFill>
+                <a:latin typeface="맑은 고딕"/>
+                <a:ea typeface="맑은 고딕"/>
+              </a:rPr>
+              <a:t>MAIL</a:t>
+            </a:r>
+          </a:p>
+        </p:txBody>
+      </p:sp>
+      <p:sp>
+        <p:nvSpPr>
+          <p:cNvPr id="11" name="텍스트"/>
+          <p:cNvSpPr txBox="1"/>
+          <p:nvPr/>
+        </p:nvSpPr>
+        <p:spPr>
+          <a:xfrm>
+            <a:off x="1152000" y="1512000"/>
+            <a:ext cx="1008000" cy="120016"/>
+          </a:xfrm>
+          <a:prstGeom prst="rect">
+            <a:avLst/>
+          </a:prstGeom>
+          <a:noFill/>
+        </p:spPr>
+        <p:txBody>
+          <a:bodyPr wrap="square" lIns="0" rIns="0" tIns="0" bIns="0" anchor="t">
+            <a:spAutoFit/>
+          </a:bodyPr>
+          <a:lstStyle/>
+          <a:p>
+            <a:pPr algn="l">
+              <a:lnSpc>
+                <a:spcPts val="913"/>
+              </a:lnSpc>
+            </a:pPr>
+            <a:r>
+              <a:rPr sz="630" b="0">
                 <a:solidFill>
                   <a:srgbClr val="FFFFFF"/>
                 </a:solidFill>
@@ -3877,16 +3456,37 @@
           </a:p>
         </p:txBody>
       </p:sp>
-      <p:sp>
-        <p:nvSpPr>
-          <p:cNvPr id="27" name="텍스트"/>
+      <p:cxnSp>
+        <p:nvCxnSpPr>
+          <p:cNvPr id="12" name="Connector 11"/>
+          <p:cNvCxnSpPr/>
+          <p:nvPr/>
+        </p:nvCxnSpPr>
+        <p:spPr>
+          <a:xfrm>
+            <a:off x="2080800" y="1411200"/>
+            <a:ext cx="0" cy="201600"/>
+          </a:xfrm>
+          <a:prstGeom prst="line">
+            <a:avLst/>
+          </a:prstGeom>
+          <a:ln w="3600">
+            <a:solidFill>
+              <a:srgbClr val="2A2F38"/>
+            </a:solidFill>
+          </a:ln>
+        </p:spPr>
+      </p:cxnSp>
+      <p:sp>
+        <p:nvSpPr>
+          <p:cNvPr id="13" name="텍스트"/>
           <p:cNvSpPr txBox="1"/>
           <p:nvPr/>
         </p:nvSpPr>
         <p:spPr>
           <a:xfrm>
-            <a:off x="1620000" y="1612800"/>
-            <a:ext cx="1368000" cy="133351"/>
+            <a:off x="2160000" y="1411200"/>
+            <a:ext cx="972000" cy="91441"/>
           </a:xfrm>
           <a:prstGeom prst="rect">
             <a:avLst/>
@@ -3899,13 +3499,53 @@
           </a:bodyPr>
           <a:lstStyle/>
           <a:p>
-            <a:pPr algn="r">
+            <a:pPr algn="l">
               <a:lnSpc>
-                <a:spcPts val="1015"/>
+                <a:spcPts val="696"/>
               </a:lnSpc>
             </a:pPr>
             <a:r>
-              <a:rPr sz="700" b="0">
+              <a:rPr sz="480" b="1" spc="140">
+                <a:solidFill>
+                  <a:srgbClr val="A3A9B5"/>
+                </a:solidFill>
+                <a:latin typeface="맑은 고딕"/>
+                <a:ea typeface="맑은 고딕"/>
+              </a:rPr>
+              <a:t>ADDR</a:t>
+            </a:r>
+          </a:p>
+        </p:txBody>
+      </p:sp>
+      <p:sp>
+        <p:nvSpPr>
+          <p:cNvPr id="14" name="텍스트"/>
+          <p:cNvSpPr txBox="1"/>
+          <p:nvPr/>
+        </p:nvSpPr>
+        <p:spPr>
+          <a:xfrm>
+            <a:off x="2160000" y="1512000"/>
+            <a:ext cx="972000" cy="120016"/>
+          </a:xfrm>
+          <a:prstGeom prst="rect">
+            <a:avLst/>
+          </a:prstGeom>
+          <a:noFill/>
+        </p:spPr>
+        <p:txBody>
+          <a:bodyPr wrap="square" lIns="0" rIns="0" tIns="0" bIns="0" anchor="t">
+            <a:spAutoFit/>
+          </a:bodyPr>
+          <a:lstStyle/>
+          <a:p>
+            <a:pPr algn="l">
+              <a:lnSpc>
+                <a:spcPts val="913"/>
+              </a:lnSpc>
+            </a:pPr>
+            <a:r>
+              <a:rPr sz="630" b="0">
                 <a:solidFill>
                   <a:srgbClr val="FFFFFF"/>
                 </a:solidFill>
@@ -3951,8 +3591,8 @@
         </p:nvSpPr>
         <p:spPr>
           <a:xfrm>
-            <a:off x="2088000" y="0"/>
-            <a:ext cx="1152000" cy="1800000"/>
+            <a:off x="0" y="0"/>
+            <a:ext cx="1188000" cy="1800000"/>
           </a:xfrm>
           <a:prstGeom prst="rect">
             <a:avLst/>
@@ -3972,27 +3612,657 @@
           </a:p>
         </p:txBody>
       </p:sp>
-      <p:sp>
-        <p:nvSpPr>
-          <p:cNvPr id="3" name="Oval 2"/>
-          <p:cNvSpPr/>
-          <p:nvPr/>
-        </p:nvSpPr>
-        <p:spPr>
-          <a:xfrm>
-            <a:off x="2397600" y="633600"/>
-            <a:ext cx="532800" cy="532800"/>
-          </a:xfrm>
-          <a:prstGeom prst="ellipse">
-            <a:avLst/>
-          </a:prstGeom>
-          <a:noFill/>
-          <a:ln w="10800">
+      <p:cxnSp>
+        <p:nvCxnSpPr>
+          <p:cNvPr id="3" name="Connector 2"/>
+          <p:cNvCxnSpPr/>
+          <p:nvPr/>
+        </p:nvCxnSpPr>
+        <p:spPr>
+          <a:xfrm flipV="1">
+            <a:off x="0" y="1224000"/>
+            <a:ext cx="57600" cy="57600"/>
+          </a:xfrm>
+          <a:prstGeom prst="line">
+            <a:avLst/>
+          </a:prstGeom>
+          <a:ln w="3600">
             <a:solidFill>
               <a:srgbClr val="FFFFFF"/>
             </a:solidFill>
           </a:ln>
         </p:spPr>
+      </p:cxnSp>
+      <p:cxnSp>
+        <p:nvCxnSpPr>
+          <p:cNvPr id="4" name="Connector 3"/>
+          <p:cNvCxnSpPr/>
+          <p:nvPr/>
+        </p:nvCxnSpPr>
+        <p:spPr>
+          <a:xfrm flipV="1">
+            <a:off x="0" y="1224000"/>
+            <a:ext cx="115200" cy="115200"/>
+          </a:xfrm>
+          <a:prstGeom prst="line">
+            <a:avLst/>
+          </a:prstGeom>
+          <a:ln w="3600">
+            <a:solidFill>
+              <a:srgbClr val="FFFFFF"/>
+            </a:solidFill>
+          </a:ln>
+        </p:spPr>
+      </p:cxnSp>
+      <p:cxnSp>
+        <p:nvCxnSpPr>
+          <p:cNvPr id="5" name="Connector 4"/>
+          <p:cNvCxnSpPr/>
+          <p:nvPr/>
+        </p:nvCxnSpPr>
+        <p:spPr>
+          <a:xfrm flipV="1">
+            <a:off x="0" y="1224000"/>
+            <a:ext cx="172800" cy="172800"/>
+          </a:xfrm>
+          <a:prstGeom prst="line">
+            <a:avLst/>
+          </a:prstGeom>
+          <a:ln w="3600">
+            <a:solidFill>
+              <a:srgbClr val="FFFFFF"/>
+            </a:solidFill>
+          </a:ln>
+        </p:spPr>
+      </p:cxnSp>
+      <p:cxnSp>
+        <p:nvCxnSpPr>
+          <p:cNvPr id="6" name="Connector 5"/>
+          <p:cNvCxnSpPr/>
+          <p:nvPr/>
+        </p:nvCxnSpPr>
+        <p:spPr>
+          <a:xfrm flipV="1">
+            <a:off x="0" y="1224000"/>
+            <a:ext cx="230400" cy="230400"/>
+          </a:xfrm>
+          <a:prstGeom prst="line">
+            <a:avLst/>
+          </a:prstGeom>
+          <a:ln w="3600">
+            <a:solidFill>
+              <a:srgbClr val="FFFFFF"/>
+            </a:solidFill>
+          </a:ln>
+        </p:spPr>
+      </p:cxnSp>
+      <p:cxnSp>
+        <p:nvCxnSpPr>
+          <p:cNvPr id="7" name="Connector 6"/>
+          <p:cNvCxnSpPr/>
+          <p:nvPr/>
+        </p:nvCxnSpPr>
+        <p:spPr>
+          <a:xfrm flipV="1">
+            <a:off x="0" y="1224000"/>
+            <a:ext cx="288000" cy="288000"/>
+          </a:xfrm>
+          <a:prstGeom prst="line">
+            <a:avLst/>
+          </a:prstGeom>
+          <a:ln w="3600">
+            <a:solidFill>
+              <a:srgbClr val="FFFFFF"/>
+            </a:solidFill>
+          </a:ln>
+        </p:spPr>
+      </p:cxnSp>
+      <p:cxnSp>
+        <p:nvCxnSpPr>
+          <p:cNvPr id="8" name="Connector 7"/>
+          <p:cNvCxnSpPr/>
+          <p:nvPr/>
+        </p:nvCxnSpPr>
+        <p:spPr>
+          <a:xfrm flipV="1">
+            <a:off x="0" y="1224000"/>
+            <a:ext cx="345600" cy="345600"/>
+          </a:xfrm>
+          <a:prstGeom prst="line">
+            <a:avLst/>
+          </a:prstGeom>
+          <a:ln w="3600">
+            <a:solidFill>
+              <a:srgbClr val="FFFFFF"/>
+            </a:solidFill>
+          </a:ln>
+        </p:spPr>
+      </p:cxnSp>
+      <p:cxnSp>
+        <p:nvCxnSpPr>
+          <p:cNvPr id="9" name="Connector 8"/>
+          <p:cNvCxnSpPr/>
+          <p:nvPr/>
+        </p:nvCxnSpPr>
+        <p:spPr>
+          <a:xfrm flipV="1">
+            <a:off x="0" y="1224000"/>
+            <a:ext cx="403200" cy="403200"/>
+          </a:xfrm>
+          <a:prstGeom prst="line">
+            <a:avLst/>
+          </a:prstGeom>
+          <a:ln w="3600">
+            <a:solidFill>
+              <a:srgbClr val="FFFFFF"/>
+            </a:solidFill>
+          </a:ln>
+        </p:spPr>
+      </p:cxnSp>
+      <p:cxnSp>
+        <p:nvCxnSpPr>
+          <p:cNvPr id="10" name="Connector 9"/>
+          <p:cNvCxnSpPr/>
+          <p:nvPr/>
+        </p:nvCxnSpPr>
+        <p:spPr>
+          <a:xfrm flipV="1">
+            <a:off x="0" y="1224000"/>
+            <a:ext cx="460800" cy="460800"/>
+          </a:xfrm>
+          <a:prstGeom prst="line">
+            <a:avLst/>
+          </a:prstGeom>
+          <a:ln w="3600">
+            <a:solidFill>
+              <a:srgbClr val="FFFFFF"/>
+            </a:solidFill>
+          </a:ln>
+        </p:spPr>
+      </p:cxnSp>
+      <p:cxnSp>
+        <p:nvCxnSpPr>
+          <p:cNvPr id="11" name="Connector 10"/>
+          <p:cNvCxnSpPr/>
+          <p:nvPr/>
+        </p:nvCxnSpPr>
+        <p:spPr>
+          <a:xfrm flipV="1">
+            <a:off x="0" y="1224000"/>
+            <a:ext cx="518400" cy="518400"/>
+          </a:xfrm>
+          <a:prstGeom prst="line">
+            <a:avLst/>
+          </a:prstGeom>
+          <a:ln w="3600">
+            <a:solidFill>
+              <a:srgbClr val="FFFFFF"/>
+            </a:solidFill>
+          </a:ln>
+        </p:spPr>
+      </p:cxnSp>
+      <p:cxnSp>
+        <p:nvCxnSpPr>
+          <p:cNvPr id="12" name="Connector 11"/>
+          <p:cNvCxnSpPr/>
+          <p:nvPr/>
+        </p:nvCxnSpPr>
+        <p:spPr>
+          <a:xfrm flipV="1">
+            <a:off x="0" y="1224000"/>
+            <a:ext cx="576000" cy="576000"/>
+          </a:xfrm>
+          <a:prstGeom prst="line">
+            <a:avLst/>
+          </a:prstGeom>
+          <a:ln w="3600">
+            <a:solidFill>
+              <a:srgbClr val="FFFFFF"/>
+            </a:solidFill>
+          </a:ln>
+        </p:spPr>
+      </p:cxnSp>
+      <p:cxnSp>
+        <p:nvCxnSpPr>
+          <p:cNvPr id="13" name="Connector 12"/>
+          <p:cNvCxnSpPr/>
+          <p:nvPr/>
+        </p:nvCxnSpPr>
+        <p:spPr>
+          <a:xfrm flipV="1">
+            <a:off x="57600" y="1224000"/>
+            <a:ext cx="576000" cy="576000"/>
+          </a:xfrm>
+          <a:prstGeom prst="line">
+            <a:avLst/>
+          </a:prstGeom>
+          <a:ln w="3600">
+            <a:solidFill>
+              <a:srgbClr val="FFFFFF"/>
+            </a:solidFill>
+          </a:ln>
+        </p:spPr>
+      </p:cxnSp>
+      <p:cxnSp>
+        <p:nvCxnSpPr>
+          <p:cNvPr id="14" name="Connector 13"/>
+          <p:cNvCxnSpPr/>
+          <p:nvPr/>
+        </p:nvCxnSpPr>
+        <p:spPr>
+          <a:xfrm flipV="1">
+            <a:off x="115200" y="1224000"/>
+            <a:ext cx="576000" cy="576000"/>
+          </a:xfrm>
+          <a:prstGeom prst="line">
+            <a:avLst/>
+          </a:prstGeom>
+          <a:ln w="3600">
+            <a:solidFill>
+              <a:srgbClr val="FFFFFF"/>
+            </a:solidFill>
+          </a:ln>
+        </p:spPr>
+      </p:cxnSp>
+      <p:cxnSp>
+        <p:nvCxnSpPr>
+          <p:cNvPr id="15" name="Connector 14"/>
+          <p:cNvCxnSpPr/>
+          <p:nvPr/>
+        </p:nvCxnSpPr>
+        <p:spPr>
+          <a:xfrm flipV="1">
+            <a:off x="172800" y="1224000"/>
+            <a:ext cx="576000" cy="576000"/>
+          </a:xfrm>
+          <a:prstGeom prst="line">
+            <a:avLst/>
+          </a:prstGeom>
+          <a:ln w="3600">
+            <a:solidFill>
+              <a:srgbClr val="FFFFFF"/>
+            </a:solidFill>
+          </a:ln>
+        </p:spPr>
+      </p:cxnSp>
+      <p:cxnSp>
+        <p:nvCxnSpPr>
+          <p:cNvPr id="16" name="Connector 15"/>
+          <p:cNvCxnSpPr/>
+          <p:nvPr/>
+        </p:nvCxnSpPr>
+        <p:spPr>
+          <a:xfrm flipV="1">
+            <a:off x="230400" y="1224000"/>
+            <a:ext cx="576000" cy="576000"/>
+          </a:xfrm>
+          <a:prstGeom prst="line">
+            <a:avLst/>
+          </a:prstGeom>
+          <a:ln w="3600">
+            <a:solidFill>
+              <a:srgbClr val="FFFFFF"/>
+            </a:solidFill>
+          </a:ln>
+        </p:spPr>
+      </p:cxnSp>
+      <p:cxnSp>
+        <p:nvCxnSpPr>
+          <p:cNvPr id="17" name="Connector 16"/>
+          <p:cNvCxnSpPr/>
+          <p:nvPr/>
+        </p:nvCxnSpPr>
+        <p:spPr>
+          <a:xfrm flipV="1">
+            <a:off x="288000" y="1224000"/>
+            <a:ext cx="576000" cy="576000"/>
+          </a:xfrm>
+          <a:prstGeom prst="line">
+            <a:avLst/>
+          </a:prstGeom>
+          <a:ln w="3600">
+            <a:solidFill>
+              <a:srgbClr val="FFFFFF"/>
+            </a:solidFill>
+          </a:ln>
+        </p:spPr>
+      </p:cxnSp>
+      <p:cxnSp>
+        <p:nvCxnSpPr>
+          <p:cNvPr id="18" name="Connector 17"/>
+          <p:cNvCxnSpPr/>
+          <p:nvPr/>
+        </p:nvCxnSpPr>
+        <p:spPr>
+          <a:xfrm flipV="1">
+            <a:off x="345600" y="1224000"/>
+            <a:ext cx="576000" cy="576000"/>
+          </a:xfrm>
+          <a:prstGeom prst="line">
+            <a:avLst/>
+          </a:prstGeom>
+          <a:ln w="3600">
+            <a:solidFill>
+              <a:srgbClr val="FFFFFF"/>
+            </a:solidFill>
+          </a:ln>
+        </p:spPr>
+      </p:cxnSp>
+      <p:cxnSp>
+        <p:nvCxnSpPr>
+          <p:cNvPr id="19" name="Connector 18"/>
+          <p:cNvCxnSpPr/>
+          <p:nvPr/>
+        </p:nvCxnSpPr>
+        <p:spPr>
+          <a:xfrm flipV="1">
+            <a:off x="403200" y="1224000"/>
+            <a:ext cx="576000" cy="576000"/>
+          </a:xfrm>
+          <a:prstGeom prst="line">
+            <a:avLst/>
+          </a:prstGeom>
+          <a:ln w="3600">
+            <a:solidFill>
+              <a:srgbClr val="FFFFFF"/>
+            </a:solidFill>
+          </a:ln>
+        </p:spPr>
+      </p:cxnSp>
+      <p:cxnSp>
+        <p:nvCxnSpPr>
+          <p:cNvPr id="20" name="Connector 19"/>
+          <p:cNvCxnSpPr/>
+          <p:nvPr/>
+        </p:nvCxnSpPr>
+        <p:spPr>
+          <a:xfrm flipV="1">
+            <a:off x="460800" y="1224000"/>
+            <a:ext cx="576000" cy="576000"/>
+          </a:xfrm>
+          <a:prstGeom prst="line">
+            <a:avLst/>
+          </a:prstGeom>
+          <a:ln w="3600">
+            <a:solidFill>
+              <a:srgbClr val="FFFFFF"/>
+            </a:solidFill>
+          </a:ln>
+        </p:spPr>
+      </p:cxnSp>
+      <p:cxnSp>
+        <p:nvCxnSpPr>
+          <p:cNvPr id="21" name="Connector 20"/>
+          <p:cNvCxnSpPr/>
+          <p:nvPr/>
+        </p:nvCxnSpPr>
+        <p:spPr>
+          <a:xfrm flipV="1">
+            <a:off x="518400" y="1224000"/>
+            <a:ext cx="576000" cy="576000"/>
+          </a:xfrm>
+          <a:prstGeom prst="line">
+            <a:avLst/>
+          </a:prstGeom>
+          <a:ln w="3600">
+            <a:solidFill>
+              <a:srgbClr val="FFFFFF"/>
+            </a:solidFill>
+          </a:ln>
+        </p:spPr>
+      </p:cxnSp>
+      <p:cxnSp>
+        <p:nvCxnSpPr>
+          <p:cNvPr id="22" name="Connector 21"/>
+          <p:cNvCxnSpPr/>
+          <p:nvPr/>
+        </p:nvCxnSpPr>
+        <p:spPr>
+          <a:xfrm flipV="1">
+            <a:off x="576000" y="1224000"/>
+            <a:ext cx="576000" cy="576000"/>
+          </a:xfrm>
+          <a:prstGeom prst="line">
+            <a:avLst/>
+          </a:prstGeom>
+          <a:ln w="3600">
+            <a:solidFill>
+              <a:srgbClr val="FFFFFF"/>
+            </a:solidFill>
+          </a:ln>
+        </p:spPr>
+      </p:cxnSp>
+      <p:cxnSp>
+        <p:nvCxnSpPr>
+          <p:cNvPr id="23" name="Connector 22"/>
+          <p:cNvCxnSpPr/>
+          <p:nvPr/>
+        </p:nvCxnSpPr>
+        <p:spPr>
+          <a:xfrm flipV="1">
+            <a:off x="633600" y="1245600"/>
+            <a:ext cx="554400" cy="554400"/>
+          </a:xfrm>
+          <a:prstGeom prst="line">
+            <a:avLst/>
+          </a:prstGeom>
+          <a:ln w="3600">
+            <a:solidFill>
+              <a:srgbClr val="FFFFFF"/>
+            </a:solidFill>
+          </a:ln>
+        </p:spPr>
+      </p:cxnSp>
+      <p:cxnSp>
+        <p:nvCxnSpPr>
+          <p:cNvPr id="24" name="Connector 23"/>
+          <p:cNvCxnSpPr/>
+          <p:nvPr/>
+        </p:nvCxnSpPr>
+        <p:spPr>
+          <a:xfrm flipV="1">
+            <a:off x="691200" y="1303200"/>
+            <a:ext cx="496800" cy="496800"/>
+          </a:xfrm>
+          <a:prstGeom prst="line">
+            <a:avLst/>
+          </a:prstGeom>
+          <a:ln w="3600">
+            <a:solidFill>
+              <a:srgbClr val="FFFFFF"/>
+            </a:solidFill>
+          </a:ln>
+        </p:spPr>
+      </p:cxnSp>
+      <p:cxnSp>
+        <p:nvCxnSpPr>
+          <p:cNvPr id="25" name="Connector 24"/>
+          <p:cNvCxnSpPr/>
+          <p:nvPr/>
+        </p:nvCxnSpPr>
+        <p:spPr>
+          <a:xfrm flipV="1">
+            <a:off x="748800" y="1360800"/>
+            <a:ext cx="439200" cy="439200"/>
+          </a:xfrm>
+          <a:prstGeom prst="line">
+            <a:avLst/>
+          </a:prstGeom>
+          <a:ln w="3600">
+            <a:solidFill>
+              <a:srgbClr val="FFFFFF"/>
+            </a:solidFill>
+          </a:ln>
+        </p:spPr>
+      </p:cxnSp>
+      <p:cxnSp>
+        <p:nvCxnSpPr>
+          <p:cNvPr id="26" name="Connector 25"/>
+          <p:cNvCxnSpPr/>
+          <p:nvPr/>
+        </p:nvCxnSpPr>
+        <p:spPr>
+          <a:xfrm flipV="1">
+            <a:off x="806400" y="1418400"/>
+            <a:ext cx="381600" cy="381600"/>
+          </a:xfrm>
+          <a:prstGeom prst="line">
+            <a:avLst/>
+          </a:prstGeom>
+          <a:ln w="3600">
+            <a:solidFill>
+              <a:srgbClr val="FFFFFF"/>
+            </a:solidFill>
+          </a:ln>
+        </p:spPr>
+      </p:cxnSp>
+      <p:cxnSp>
+        <p:nvCxnSpPr>
+          <p:cNvPr id="27" name="Connector 26"/>
+          <p:cNvCxnSpPr/>
+          <p:nvPr/>
+        </p:nvCxnSpPr>
+        <p:spPr>
+          <a:xfrm flipV="1">
+            <a:off x="864000" y="1476000"/>
+            <a:ext cx="324000" cy="324000"/>
+          </a:xfrm>
+          <a:prstGeom prst="line">
+            <a:avLst/>
+          </a:prstGeom>
+          <a:ln w="3600">
+            <a:solidFill>
+              <a:srgbClr val="FFFFFF"/>
+            </a:solidFill>
+          </a:ln>
+        </p:spPr>
+      </p:cxnSp>
+      <p:cxnSp>
+        <p:nvCxnSpPr>
+          <p:cNvPr id="28" name="Connector 27"/>
+          <p:cNvCxnSpPr/>
+          <p:nvPr/>
+        </p:nvCxnSpPr>
+        <p:spPr>
+          <a:xfrm flipV="1">
+            <a:off x="921600" y="1533600"/>
+            <a:ext cx="266400" cy="266400"/>
+          </a:xfrm>
+          <a:prstGeom prst="line">
+            <a:avLst/>
+          </a:prstGeom>
+          <a:ln w="3600">
+            <a:solidFill>
+              <a:srgbClr val="FFFFFF"/>
+            </a:solidFill>
+          </a:ln>
+        </p:spPr>
+      </p:cxnSp>
+      <p:cxnSp>
+        <p:nvCxnSpPr>
+          <p:cNvPr id="29" name="Connector 28"/>
+          <p:cNvCxnSpPr/>
+          <p:nvPr/>
+        </p:nvCxnSpPr>
+        <p:spPr>
+          <a:xfrm flipV="1">
+            <a:off x="979200" y="1591200"/>
+            <a:ext cx="208800" cy="208800"/>
+          </a:xfrm>
+          <a:prstGeom prst="line">
+            <a:avLst/>
+          </a:prstGeom>
+          <a:ln w="3600">
+            <a:solidFill>
+              <a:srgbClr val="FFFFFF"/>
+            </a:solidFill>
+          </a:ln>
+        </p:spPr>
+      </p:cxnSp>
+      <p:cxnSp>
+        <p:nvCxnSpPr>
+          <p:cNvPr id="30" name="Connector 29"/>
+          <p:cNvCxnSpPr/>
+          <p:nvPr/>
+        </p:nvCxnSpPr>
+        <p:spPr>
+          <a:xfrm flipV="1">
+            <a:off x="1036800" y="1648800"/>
+            <a:ext cx="151200" cy="151200"/>
+          </a:xfrm>
+          <a:prstGeom prst="line">
+            <a:avLst/>
+          </a:prstGeom>
+          <a:ln w="3600">
+            <a:solidFill>
+              <a:srgbClr val="FFFFFF"/>
+            </a:solidFill>
+          </a:ln>
+        </p:spPr>
+      </p:cxnSp>
+      <p:cxnSp>
+        <p:nvCxnSpPr>
+          <p:cNvPr id="31" name="Connector 30"/>
+          <p:cNvCxnSpPr/>
+          <p:nvPr/>
+        </p:nvCxnSpPr>
+        <p:spPr>
+          <a:xfrm flipV="1">
+            <a:off x="1094400" y="1706400"/>
+            <a:ext cx="93600" cy="93600"/>
+          </a:xfrm>
+          <a:prstGeom prst="line">
+            <a:avLst/>
+          </a:prstGeom>
+          <a:ln w="3600">
+            <a:solidFill>
+              <a:srgbClr val="FFFFFF"/>
+            </a:solidFill>
+          </a:ln>
+        </p:spPr>
+      </p:cxnSp>
+      <p:cxnSp>
+        <p:nvCxnSpPr>
+          <p:cNvPr id="32" name="Connector 31"/>
+          <p:cNvCxnSpPr/>
+          <p:nvPr/>
+        </p:nvCxnSpPr>
+        <p:spPr>
+          <a:xfrm flipV="1">
+            <a:off x="1152000" y="1764000"/>
+            <a:ext cx="36000" cy="36000"/>
+          </a:xfrm>
+          <a:prstGeom prst="line">
+            <a:avLst/>
+          </a:prstGeom>
+          <a:ln w="3600">
+            <a:solidFill>
+              <a:srgbClr val="FFFFFF"/>
+            </a:solidFill>
+          </a:ln>
+        </p:spPr>
+      </p:cxnSp>
+      <p:sp>
+        <p:nvSpPr>
+          <p:cNvPr id="33" name="Oval 32"/>
+          <p:cNvSpPr/>
+          <p:nvPr/>
+        </p:nvSpPr>
+        <p:spPr>
+          <a:xfrm>
+            <a:off x="216000" y="252000"/>
+            <a:ext cx="288000" cy="288000"/>
+          </a:xfrm>
+          <a:prstGeom prst="ellipse">
+            <a:avLst/>
+          </a:prstGeom>
+          <a:noFill/>
+          <a:ln w="5760">
+            <a:solidFill>
+              <a:srgbClr val="FFFFFF"/>
+            </a:solidFill>
+          </a:ln>
+        </p:spPr>
         <p:txBody>
           <a:bodyPr rtlCol="0" anchor="ctr"/>
           <a:lstStyle/>
@@ -4003,14 +4273,14 @@
       </p:sp>
       <p:sp>
         <p:nvSpPr>
-          <p:cNvPr id="4" name="텍스트"/>
+          <p:cNvPr id="34" name="텍스트"/>
           <p:cNvSpPr txBox="1"/>
           <p:nvPr/>
         </p:nvSpPr>
         <p:spPr>
           <a:xfrm>
-            <a:off x="2304000" y="684000"/>
-            <a:ext cx="720000" cy="432000"/>
+            <a:off x="216000" y="252000"/>
+            <a:ext cx="288000" cy="288000"/>
           </a:xfrm>
           <a:prstGeom prst="rect">
             <a:avLst/>
@@ -4025,11 +4295,11 @@
           <a:p>
             <a:pPr algn="ctr">
               <a:lnSpc>
-                <a:spcPts val="4350"/>
+                <a:spcPts val="2030"/>
               </a:lnSpc>
             </a:pPr>
             <a:r>
-              <a:rPr sz="3000" b="1">
+              <a:rPr sz="1400" b="1">
                 <a:solidFill>
                   <a:srgbClr val="FFFFFF"/>
                 </a:solidFill>
@@ -4043,14 +4313,14 @@
       </p:sp>
       <p:sp>
         <p:nvSpPr>
-          <p:cNvPr id="5" name="텍스트"/>
+          <p:cNvPr id="35" name="텍스트"/>
           <p:cNvSpPr txBox="1"/>
           <p:nvPr/>
         </p:nvSpPr>
         <p:spPr>
           <a:xfrm>
-            <a:off x="252000" y="540000"/>
-            <a:ext cx="1620000" cy="720000"/>
+            <a:off x="216000" y="1440000"/>
+            <a:ext cx="828000" cy="142876"/>
           </a:xfrm>
           <a:prstGeom prst="rect">
             <a:avLst/>
@@ -4065,49 +4335,215 @@
           <a:p>
             <a:pPr algn="l">
               <a:lnSpc>
-                <a:spcPts val="1739"/>
+                <a:spcPts val="1087"/>
               </a:lnSpc>
             </a:pPr>
             <a:r>
-              <a:rPr sz="1200" b="1">
+              <a:rPr sz="750" b="1" spc="100">
+                <a:solidFill>
+                  <a:srgbClr val="FFFFFF"/>
+                </a:solidFill>
+                <a:latin typeface="맑은 고딕"/>
+                <a:ea typeface="맑은 고딕"/>
+              </a:rPr>
+              <a:t>담당 업무</a:t>
+            </a:r>
+          </a:p>
+        </p:txBody>
+      </p:sp>
+      <p:sp>
+        <p:nvSpPr>
+          <p:cNvPr id="36" name="텍스트"/>
+          <p:cNvSpPr txBox="1"/>
+          <p:nvPr/>
+        </p:nvSpPr>
+        <p:spPr>
+          <a:xfrm>
+            <a:off x="1440000" y="223200"/>
+            <a:ext cx="1080000" cy="99061"/>
+          </a:xfrm>
+          <a:prstGeom prst="rect">
+            <a:avLst/>
+          </a:prstGeom>
+          <a:noFill/>
+        </p:spPr>
+        <p:txBody>
+          <a:bodyPr wrap="square" lIns="0" rIns="0" tIns="0" bIns="0" anchor="t">
+            <a:spAutoFit/>
+          </a:bodyPr>
+          <a:lstStyle/>
+          <a:p>
+            <a:pPr algn="l">
+              <a:lnSpc>
+                <a:spcPts val="754"/>
+              </a:lnSpc>
+            </a:pPr>
+            <a:r>
+              <a:rPr sz="520" b="1" spc="240">
+                <a:solidFill>
+                  <a:srgbClr val="6B7280"/>
+                </a:solidFill>
+                <a:latin typeface="맑은 고딕"/>
+                <a:ea typeface="맑은 고딕"/>
+              </a:rPr>
+              <a:t>담당 업무</a:t>
+            </a:r>
+          </a:p>
+        </p:txBody>
+      </p:sp>
+      <p:cxnSp>
+        <p:nvCxnSpPr>
+          <p:cNvPr id="37" name="Connector 36"/>
+          <p:cNvCxnSpPr/>
+          <p:nvPr/>
+        </p:nvCxnSpPr>
+        <p:spPr>
+          <a:xfrm>
+            <a:off x="1440000" y="360000"/>
+            <a:ext cx="1548000" cy="0"/>
+          </a:xfrm>
+          <a:prstGeom prst="line">
+            <a:avLst/>
+          </a:prstGeom>
+          <a:ln w="3600">
+            <a:solidFill>
+              <a:srgbClr val="E3E5E9"/>
+            </a:solidFill>
+          </a:ln>
+        </p:spPr>
+      </p:cxnSp>
+      <p:sp>
+        <p:nvSpPr>
+          <p:cNvPr id="38" name="텍스트"/>
+          <p:cNvSpPr txBox="1"/>
+          <p:nvPr/>
+        </p:nvSpPr>
+        <p:spPr>
+          <a:xfrm>
+            <a:off x="1440000" y="403200"/>
+            <a:ext cx="1296000" cy="133351"/>
+          </a:xfrm>
+          <a:prstGeom prst="rect">
+            <a:avLst/>
+          </a:prstGeom>
+          <a:noFill/>
+        </p:spPr>
+        <p:txBody>
+          <a:bodyPr wrap="square" lIns="0" rIns="0" tIns="0" bIns="0" anchor="t">
+            <a:spAutoFit/>
+          </a:bodyPr>
+          <a:lstStyle/>
+          <a:p>
+            <a:pPr algn="l">
+              <a:lnSpc>
+                <a:spcPts val="1015"/>
+              </a:lnSpc>
+            </a:pPr>
+            <a:r>
+              <a:rPr sz="700" b="0">
                 <a:solidFill>
                   <a:srgbClr val="12151C"/>
                 </a:solidFill>
                 <a:latin typeface="맑은 고딕"/>
                 <a:ea typeface="맑은 고딕"/>
               </a:rPr>
-              <a:t>처음 만난</a:t>
-            </a:r>
-          </a:p>
+              <a:t>영업 관리</a:t>
+            </a:r>
+          </a:p>
+        </p:txBody>
+      </p:sp>
+      <p:cxnSp>
+        <p:nvCxnSpPr>
+          <p:cNvPr id="39" name="Connector 38"/>
+          <p:cNvCxnSpPr/>
+          <p:nvPr/>
+        </p:nvCxnSpPr>
+        <p:spPr>
+          <a:xfrm>
+            <a:off x="1440000" y="561600"/>
+            <a:ext cx="1548000" cy="0"/>
+          </a:xfrm>
+          <a:prstGeom prst="line">
+            <a:avLst/>
+          </a:prstGeom>
+          <a:ln w="3600">
+            <a:solidFill>
+              <a:srgbClr val="E3E5E9"/>
+            </a:solidFill>
+          </a:ln>
+        </p:spPr>
+      </p:cxnSp>
+      <p:sp>
+        <p:nvSpPr>
+          <p:cNvPr id="40" name="텍스트"/>
+          <p:cNvSpPr txBox="1"/>
+          <p:nvPr/>
+        </p:nvSpPr>
+        <p:spPr>
+          <a:xfrm>
+            <a:off x="1440000" y="604800"/>
+            <a:ext cx="1296000" cy="133351"/>
+          </a:xfrm>
+          <a:prstGeom prst="rect">
+            <a:avLst/>
+          </a:prstGeom>
+          <a:noFill/>
+        </p:spPr>
+        <p:txBody>
+          <a:bodyPr wrap="square" lIns="0" rIns="0" tIns="0" bIns="0" anchor="t">
+            <a:spAutoFit/>
+          </a:bodyPr>
+          <a:lstStyle/>
           <a:p>
             <a:pPr algn="l">
               <a:lnSpc>
-                <a:spcPts val="1739"/>
+                <a:spcPts val="1015"/>
               </a:lnSpc>
             </a:pPr>
             <a:r>
-              <a:rPr sz="1200" b="1">
+              <a:rPr sz="700" b="0">
                 <a:solidFill>
                   <a:srgbClr val="12151C"/>
                 </a:solidFill>
                 <a:latin typeface="맑은 고딕"/>
                 <a:ea typeface="맑은 고딕"/>
               </a:rPr>
-              <a:t>날처럼 한결같이</a:t>
-            </a:r>
-          </a:p>
-        </p:txBody>
-      </p:sp>
-      <p:sp>
-        <p:nvSpPr>
-          <p:cNvPr id="6" name="텍스트"/>
+              <a:t>마케팅</a:t>
+            </a:r>
+          </a:p>
+        </p:txBody>
+      </p:sp>
+      <p:cxnSp>
+        <p:nvCxnSpPr>
+          <p:cNvPr id="41" name="Connector 40"/>
+          <p:cNvCxnSpPr/>
+          <p:nvPr/>
+        </p:nvCxnSpPr>
+        <p:spPr>
+          <a:xfrm>
+            <a:off x="1440000" y="763200"/>
+            <a:ext cx="1548000" cy="0"/>
+          </a:xfrm>
+          <a:prstGeom prst="line">
+            <a:avLst/>
+          </a:prstGeom>
+          <a:ln w="3600">
+            <a:solidFill>
+              <a:srgbClr val="E3E5E9"/>
+            </a:solidFill>
+          </a:ln>
+        </p:spPr>
+      </p:cxnSp>
+      <p:sp>
+        <p:nvSpPr>
+          <p:cNvPr id="42" name="텍스트"/>
           <p:cNvSpPr txBox="1"/>
           <p:nvPr/>
         </p:nvSpPr>
         <p:spPr>
           <a:xfrm>
-            <a:off x="252000" y="1512000"/>
-            <a:ext cx="1584000" cy="123826"/>
+            <a:off x="1440000" y="806400"/>
+            <a:ext cx="1296000" cy="133351"/>
           </a:xfrm>
           <a:prstGeom prst="rect">
             <a:avLst/>
@@ -4122,18 +4558,79 @@
           <a:p>
             <a:pPr algn="l">
               <a:lnSpc>
-                <a:spcPts val="942"/>
+                <a:spcPts val="1015"/>
               </a:lnSpc>
             </a:pPr>
             <a:r>
-              <a:rPr sz="650" b="1" spc="200">
+              <a:rPr sz="700" b="0">
+                <a:solidFill>
+                  <a:srgbClr val="12151C"/>
+                </a:solidFill>
+                <a:latin typeface="맑은 고딕"/>
+                <a:ea typeface="맑은 고딕"/>
+              </a:rPr>
+              <a:t>고객 응대</a:t>
+            </a:r>
+          </a:p>
+        </p:txBody>
+      </p:sp>
+      <p:cxnSp>
+        <p:nvCxnSpPr>
+          <p:cNvPr id="43" name="Connector 42"/>
+          <p:cNvCxnSpPr/>
+          <p:nvPr/>
+        </p:nvCxnSpPr>
+        <p:spPr>
+          <a:xfrm>
+            <a:off x="1440000" y="964800"/>
+            <a:ext cx="1548000" cy="0"/>
+          </a:xfrm>
+          <a:prstGeom prst="line">
+            <a:avLst/>
+          </a:prstGeom>
+          <a:ln w="3600">
+            <a:solidFill>
+              <a:srgbClr val="E3E5E9"/>
+            </a:solidFill>
+          </a:ln>
+        </p:spPr>
+      </p:cxnSp>
+      <p:sp>
+        <p:nvSpPr>
+          <p:cNvPr id="44" name="텍스트"/>
+          <p:cNvSpPr txBox="1"/>
+          <p:nvPr/>
+        </p:nvSpPr>
+        <p:spPr>
+          <a:xfrm>
+            <a:off x="1440000" y="1569600"/>
+            <a:ext cx="1548000" cy="114301"/>
+          </a:xfrm>
+          <a:prstGeom prst="rect">
+            <a:avLst/>
+          </a:prstGeom>
+          <a:noFill/>
+        </p:spPr>
+        <p:txBody>
+          <a:bodyPr wrap="square" lIns="0" rIns="0" tIns="0" bIns="0" anchor="t">
+            <a:spAutoFit/>
+          </a:bodyPr>
+          <a:lstStyle/>
+          <a:p>
+            <a:pPr algn="l">
+              <a:lnSpc>
+                <a:spcPts val="869"/>
+              </a:lnSpc>
+            </a:pPr>
+            <a:r>
+              <a:rPr sz="600" b="0">
                 <a:solidFill>
                   <a:srgbClr val="6B7280"/>
                 </a:solidFill>
                 <a:latin typeface="맑은 고딕"/>
                 <a:ea typeface="맑은 고딕"/>
               </a:rPr>
-              <a:t>회사명 · 부서명</a:t>
+              <a:t>평일 10:00 – 19:00   |   @채널아이디</a:t>
             </a:r>
           </a:p>
         </p:txBody>
